--- a/lecons/F2/02_F2_M1_PW01_Calculation_of_the_Demographic_Indices_of_Cameroon.pptx
+++ b/lecons/F2/02_F2_M1_PW01_Calculation_of_the_Demographic_Indices_of_Cameroon.pptx
@@ -57,9 +57,10 @@
     <p:sldId id="305" r:id="rId51"/>
     <p:sldId id="306" r:id="rId52"/>
     <p:sldId id="307" r:id="rId53"/>
+    <p:sldId id="308" r:id="rId54"/>
   </p:sldIdLst>
   <p:notesMasterIdLst>
-    <p:notesMasterId r:id="rId54"/>
+    <p:notesMasterId r:id="rId55"/>
   </p:notesMasterIdLst>
   <p:sldSz cx="12192000" cy="6858000"/>
   <p:notesSz cx="6858000" cy="12192000"/>
@@ -729,7 +730,7 @@
           <a:p>
             <a:r>
               <a:rPr lang="en-US" dirty="0"/>
-              <a:t>Good. The Mayor wants to know the growth of the town.</a:t>
+              <a:t>Good. The Mayor does not know how to measure the growth of the town with numbers.</a:t>
             </a:r>
             <a:endParaRPr lang="en-US" dirty="0"/>
           </a:p>
@@ -1345,7 +1346,7 @@
           <a:p>
             <a:r>
               <a:rPr lang="en-US" dirty="0"/>
-              <a:t>Activity 1. Look carefully at this diagram: birth and death rates. Observe every detail before I ask the question.</a:t>
+              <a:t>Activity 1. Look carefully at this picture: a newborn baby. Observe every detail before I ask the question.</a:t>
             </a:r>
             <a:endParaRPr lang="en-US" dirty="0"/>
           </a:p>
@@ -1433,7 +1434,7 @@
           <a:p>
             <a:r>
               <a:rPr lang="en-US" dirty="0"/>
-              <a:t>Here is the question for Activity 1: What is the birth rate? Take one minute to think and write your answer in your rough notebook.</a:t>
+              <a:t>Here is the question for Activity 1: How do we compare the births of a big town and a small town fairly? Take one minute to think and write your answer in your rough notebook.</a:t>
             </a:r>
             <a:endParaRPr lang="en-US" dirty="0"/>
           </a:p>
@@ -1609,7 +1610,7 @@
           <a:p>
             <a:r>
               <a:rPr lang="en-US" dirty="0"/>
-              <a:t>Let us check the answer together. The number of births per 1,000 people in one year.</a:t>
+              <a:t>Let us check the answer together. We count the births for every 1,000 people: this is the birth rate.</a:t>
             </a:r>
             <a:endParaRPr lang="en-US" dirty="0"/>
           </a:p>
@@ -1697,7 +1698,7 @@
           <a:p>
             <a:r>
               <a:rPr lang="en-US" dirty="0"/>
-              <a:t>Activity 2. Look carefully at this picture: a newborn baby. Observe every detail before I ask the question.</a:t>
+              <a:t>Activity 2. Look carefully at this diagram: calculating indices. Observe every detail before I ask the question.</a:t>
             </a:r>
             <a:endParaRPr lang="en-US" dirty="0"/>
           </a:p>
@@ -1961,7 +1962,7 @@
           <a:p>
             <a:r>
               <a:rPr lang="en-US" dirty="0"/>
-              <a:t>Activity 3. Look carefully at this diagram: calculating demographic indices. Observe every detail before I ask the question.</a:t>
+              <a:t>Activity 3. Look carefully at this diagram: calculating indices. Observe every detail before I ask the question.</a:t>
             </a:r>
             <a:endParaRPr lang="en-US" dirty="0"/>
           </a:p>
@@ -2489,7 +2490,7 @@
           <a:p>
             <a:r>
               <a:rPr lang="en-US" dirty="0"/>
-              <a:t>Our topic is Man in his Environment, and the sub-topic is The World's Population. The key notions we shall use today are: birth rate, death rate, natural growth rate, per thousand (‰), per cent (%). At the end, you should be able to do this: learners are able to calculate the birth rate, death rate and natural growth rate of a population.</a:t>
+              <a:t>Our topic is Man in his Environment, and the sub-topic is The World's Population. The key notions we shall use today are: birth rate, death rate, natural growth rate. At the end, you should be able to do this: learners are able to calculate the birth rate, death rate and natural growth rate of a population.</a:t>
             </a:r>
             <a:endParaRPr lang="en-US" dirty="0"/>
           </a:p>
@@ -2665,7 +2666,7 @@
           <a:p>
             <a:r>
               <a:rPr lang="en-US" dirty="0"/>
-              <a:t>Here is the question for Activity 5: What does the graph show about Cameroon? Take one minute to think and write your answer in your rough notebook.</a:t>
+              <a:t>Here is the question for Activity 5: Which rate has fallen faster in Cameroon: the birth rate or the death rate? Take one minute to think and write your answer in your rough notebook.</a:t>
             </a:r>
             <a:endParaRPr lang="en-US" dirty="0"/>
           </a:p>
@@ -2753,7 +2754,7 @@
           <a:p>
             <a:r>
               <a:rPr lang="en-US" dirty="0"/>
-              <a:t>Let us check the answer together. The death rate has fallen faster than the birth rate, so the population grows quickly.</a:t>
+              <a:t>Let us check the answer together. The death rate, so the population grows quickly.</a:t>
             </a:r>
             <a:endParaRPr lang="en-US" dirty="0"/>
           </a:p>
@@ -3105,7 +3106,7 @@
           <a:p>
             <a:r>
               <a:rPr lang="en-US" dirty="0"/>
-              <a:t>Let us copy Formulas. The demographic indices are calculated as follows. On this slide we have Birth rate and Death rate. Write each point on a new line, with the key term first, and explain it in your own words when we revise. When you finish, we go to the next slide.</a:t>
+              <a:t>Let us copy Formulas. The demographic indices are calculated with the following formulas. Copy the point on Birth rate on the left, then draw the diagram on the right: formulas and example. Give it a title and label it clearly.</a:t>
             </a:r>
             <a:endParaRPr lang="en-US" dirty="0"/>
           </a:p>
@@ -3193,7 +3194,7 @@
           <a:p>
             <a:r>
               <a:rPr lang="en-US" dirty="0"/>
-              <a:t>We continue with Formulas. On this slide we have Natural growth rate. Write each point on a new line, with the key term first, and explain it in your own words when we revise.</a:t>
+              <a:t>We continue with Formulas. On this slide we have Death rate and Natural growth rate. Write each point on a new line, with the key term first, and explain it in your own words when we revise.</a:t>
             </a:r>
             <a:endParaRPr lang="en-US" dirty="0"/>
           </a:p>
@@ -3545,7 +3546,7 @@
           <a:p>
             <a:r>
               <a:rPr lang="en-US" dirty="0"/>
-              <a:t>Now draw this illustration in your notebook: calculating demographic indices. Give it a title and label it clearly.</a:t>
+              <a:t>Let us copy The Case of Cameroon. The indices of Cameroon are the following (approximate). Copy the point on Birth rate on the left, then draw the diagram on the right: birth and death rates of Cameroon. Give it a title and label it clearly.</a:t>
             </a:r>
             <a:endParaRPr lang="en-US" dirty="0"/>
           </a:p>
@@ -3633,7 +3634,7 @@
           <a:p>
             <a:r>
               <a:rPr lang="en-US" dirty="0"/>
-              <a:t>Now let us check what you have understood. Question 1: A population of 50,000 has 2,000 births. Find the birth rate. Answer in your exercise book.</a:t>
+              <a:t>We continue with The Case of Cameroon. On this slide we have Death rate and Natural growth rate. Write each point on a new line, with the key term first, and explain it in your own words when we revise.</a:t>
             </a:r>
             <a:endParaRPr lang="en-US" dirty="0"/>
           </a:p>
@@ -3721,7 +3722,7 @@
           <a:p>
             <a:r>
               <a:rPr lang="en-US" dirty="0"/>
-              <a:t>The expected answer is: (2,000 ÷ 50,000) × 1,000 = 40 ‰. If you got it right, well done.</a:t>
+              <a:t>Now let us check what you have understood. Question 1: A population of 50,000 has 2,000 births. Find the birth rate. Answer in your exercise book.</a:t>
             </a:r>
             <a:endParaRPr lang="en-US" dirty="0"/>
           </a:p>
@@ -3809,7 +3810,7 @@
           <a:p>
             <a:r>
               <a:rPr lang="en-US" dirty="0"/>
-              <a:t>Now let us check what you have understood. Question 2: Birth rate 38 ‰, death rate 10 ‰. Find the natural growth rate. Answer in your exercise book.</a:t>
+              <a:t>The expected answer is: (2,000 ÷ 50,000) × 1,000 = 40 ‰. If you got it right, well done.</a:t>
             </a:r>
             <a:endParaRPr lang="en-US" dirty="0"/>
           </a:p>
@@ -3897,7 +3898,7 @@
           <a:p>
             <a:r>
               <a:rPr lang="en-US" dirty="0"/>
-              <a:t>The expected answer is: (38 − 10) ÷ 10 = 2.8 %. If you got it right, well done.</a:t>
+              <a:t>Now let us check what you have understood. Question 2: Birth rate 38 ‰, death rate 10 ‰. Find the natural growth rate. Answer in your exercise book.</a:t>
             </a:r>
             <a:endParaRPr lang="en-US" dirty="0"/>
           </a:p>
@@ -3985,7 +3986,7 @@
           <a:p>
             <a:r>
               <a:rPr lang="en-US" dirty="0"/>
-              <a:t>For those who need more practice, fill in the blanks in your exercise book. The answers are: number 1, thousand (‰); number 2, per cent (%); number 3, growth.</a:t>
+              <a:t>The expected answer is: (38 − 10) ÷ 10 = 2.8 %. If you got it right, well done.</a:t>
             </a:r>
             <a:endParaRPr lang="en-US" dirty="0"/>
           </a:p>
@@ -4073,7 +4074,7 @@
           <a:p>
             <a:r>
               <a:rPr lang="en-US" dirty="0"/>
-              <a:t>For your homework: A village of 5,000 people has 200 births and 50 deaths. Calculate the three indices. We shall correct it at the beginning of our next lesson.</a:t>
+              <a:t>For those who need more practice, fill in the blanks in your exercise book. The answers are: number 1, thousand (‰); number 2, per cent (%); number 3, growth.</a:t>
             </a:r>
             <a:endParaRPr lang="en-US" dirty="0"/>
           </a:p>
@@ -4161,7 +4162,7 @@
           <a:p>
             <a:r>
               <a:rPr lang="en-US" dirty="0"/>
-              <a:t>Our next lesson will be on Lesson 2: The Uneven Distribution of the World's Population. Thank you for your attention, and see you next time.</a:t>
+              <a:t>For your homework: A village of 5,000 people has 200 births and 50 deaths. Calculate the three indices. We shall correct it at the beginning of our next lesson.</a:t>
             </a:r>
             <a:endParaRPr lang="en-US" dirty="0"/>
           </a:p>
@@ -4249,7 +4250,7 @@
           <a:p>
             <a:r>
               <a:rPr lang="en-US" dirty="0"/>
-              <a:t>Let us play the bilingual game. I say a word in English, and you give me the French word. Then we do the reverse.</a:t>
+              <a:t>Our next lesson will be on Lesson 2: The Uneven Distribution of the World's Population. Thank you for your attention, and see you next time.</a:t>
             </a:r>
             <a:endParaRPr lang="en-US" dirty="0"/>
           </a:p>
@@ -4337,7 +4338,7 @@
           <a:p>
             <a:r>
               <a:rPr lang="en-US" dirty="0"/>
-              <a:t>I record this information in the official logbook of the class after the lesson.</a:t>
+              <a:t>Let us play the bilingual game. I say a word in English, and you give me the French word. Then we do the reverse.</a:t>
             </a:r>
             <a:endParaRPr lang="en-US" dirty="0"/>
           </a:p>
@@ -4513,7 +4514,7 @@
           <a:p>
             <a:r>
               <a:rPr lang="en-US" dirty="0"/>
-              <a:t>I complete the second page of the logbook: the matter taught, the evaluation, the homework and the attendance.</a:t>
+              <a:t>I record this information in the official logbook of the class after the lesson.</a:t>
             </a:r>
             <a:endParaRPr lang="en-US" dirty="0"/>
           </a:p>
@@ -4601,7 +4602,7 @@
           <a:p>
             <a:r>
               <a:rPr lang="en-US" dirty="0"/>
-              <a:t>This slide is for me, the teacher: it gives the timing of the lesson and what to do if the projector is not available.</a:t>
+              <a:t>I complete the second page of the logbook: the matter taught, the evaluation, the homework and the attendance.</a:t>
             </a:r>
             <a:endParaRPr lang="en-US" dirty="0"/>
           </a:p>
@@ -4689,7 +4690,7 @@
           <a:p>
             <a:r>
               <a:rPr lang="en-US" dirty="0"/>
-              <a:t>These are the references and picture credits used to prepare this lesson.</a:t>
+              <a:t>This slide is for me, the teacher: it gives the timing of the lesson and what to do if the projector is not available.</a:t>
             </a:r>
             <a:endParaRPr lang="en-US" dirty="0"/>
           </a:p>
@@ -4713,6 +4714,94 @@
             <a:fld id="{F7021451-1387-4CA6-816F-3879F97B5CBC}" type="slidenum">
               <a:rPr lang="en-US"/>
               <a:t>52</a:t>
+            </a:fld>
+            <a:endParaRPr lang="en-US"/>
+          </a:p>
+        </p:txBody>
+      </p:sp>
+    </p:spTree>
+    <p:extLst>
+      <p:ext uri="{BB962C8B-B14F-4D97-AF65-F5344CB8AC3E}">
+        <p14:creationId xmlns:p14="http://schemas.microsoft.com/office/powerpoint/2010/main" val="1024086991"/>
+      </p:ext>
+    </p:extLst>
+  </p:cSld>
+  <p:clrMapOvr>
+    <a:masterClrMapping/>
+  </p:clrMapOvr>
+</p:notes>
+</file>
+
+<file path=ppt/notesSlides/notesSlide53.xml><?xml version="1.0" encoding="utf-8"?>
+<p:notes xmlns:a="http://schemas.openxmlformats.org/drawingml/2006/main" xmlns:r="http://schemas.openxmlformats.org/officeDocument/2006/relationships" xmlns:p="http://schemas.openxmlformats.org/presentationml/2006/main">
+  <p:cSld>
+    <p:spTree>
+      <p:nvGrpSpPr>
+        <p:cNvPr id="1" name=""/>
+        <p:cNvGrpSpPr/>
+        <p:nvPr/>
+      </p:nvGrpSpPr>
+      <p:grpSpPr>
+        <a:xfrm>
+          <a:off x="0" y="0"/>
+          <a:ext cx="0" cy="0"/>
+          <a:chOff x="0" y="0"/>
+          <a:chExt cx="0" cy="0"/>
+        </a:xfrm>
+      </p:grpSpPr>
+      <p:sp>
+        <p:nvSpPr>
+          <p:cNvPr id="2" name="Slide Image Placeholder 1"/>
+          <p:cNvSpPr>
+            <a:spLocks noGrp="1" noRot="1" noChangeAspect="1"/>
+          </p:cNvSpPr>
+          <p:nvPr>
+            <p:ph type="sldImg"/>
+          </p:nvPr>
+        </p:nvSpPr>
+        <p:spPr/>
+      </p:sp>
+      <p:sp>
+        <p:nvSpPr>
+          <p:cNvPr id="3" name="Notes Placeholder 2"/>
+          <p:cNvSpPr>
+            <a:spLocks noGrp="1"/>
+          </p:cNvSpPr>
+          <p:nvPr>
+            <p:ph type="body" idx="1"/>
+          </p:nvPr>
+        </p:nvSpPr>
+        <p:spPr/>
+        <p:txBody>
+          <a:bodyPr/>
+          <a:lstStyle/>
+          <a:p>
+            <a:r>
+              <a:rPr lang="en-US" dirty="0"/>
+              <a:t>These are the references and picture credits used to prepare this lesson.</a:t>
+            </a:r>
+            <a:endParaRPr lang="en-US" dirty="0"/>
+          </a:p>
+        </p:txBody>
+      </p:sp>
+      <p:sp>
+        <p:nvSpPr>
+          <p:cNvPr id="4" name="Slide Number Placeholder 3"/>
+          <p:cNvSpPr>
+            <a:spLocks noGrp="1"/>
+          </p:cNvSpPr>
+          <p:nvPr>
+            <p:ph type="sldNum" sz="quarter" idx="10"/>
+          </p:nvPr>
+        </p:nvSpPr>
+        <p:spPr/>
+        <p:txBody>
+          <a:bodyPr/>
+          <a:lstStyle/>
+          <a:p>
+            <a:fld id="{F7021451-1387-4CA6-816F-3879F97B5CBC}" type="slidenum">
+              <a:rPr lang="en-US"/>
+              <a:t>53</a:t>
             </a:fld>
             <a:endParaRPr lang="en-US"/>
           </a:p>
@@ -5041,7 +5130,7 @@
           <a:p>
             <a:r>
               <a:rPr lang="en-US" dirty="0"/>
-              <a:t>Listen carefully to this situation from real life. In one year, a town of 100,000 people records 3,500 births and 900 deaths. The Mayor wants to know how fast the population of the town is growing. Think about it, because I am going to ask you some questions.</a:t>
+              <a:t>Listen carefully to this situation from real life. In one year, a town of 100,000 people records 3,500 births and 900 deaths. The Mayor asks the class: "How can you tell me, with numbers, how fast our town is growing?" Think about it, because I am going to ask you some questions.</a:t>
             </a:r>
             <a:endParaRPr lang="en-US" dirty="0"/>
           </a:p>
@@ -6724,7 +6813,7 @@
                 <a:ea typeface="Times New Roman" pitchFamily="34" charset="-122"/>
                 <a:cs typeface="Times New Roman" pitchFamily="34" charset="-120"/>
               </a:rPr>
-              <a:t>The Mayor wants to know the growth of the town.</a:t>
+              <a:t>The Mayor does not know how to measure the growth of the town with numbers.</a:t>
             </a:r>
             <a:endParaRPr lang="en-US" sz="4000" dirty="0"/>
           </a:p>
@@ -8197,7 +8286,7 @@
       </p:sp>
       <p:pic>
         <p:nvPicPr>
-          <p:cNvPr id="4" name="Image 0" descr="/home/claude/f4/img/v2/birth_death_big.png">    </p:cNvPr>
+          <p:cNvPr id="4" name="Image 0" descr="/home/claude/f4/img/v2/usa_newborn.jpg">    </p:cNvPr>
           <p:cNvPicPr>
             <a:picLocks noChangeAspect="1"/>
           </p:cNvPicPr>
@@ -8211,8 +8300,8 @@
         </p:blipFill>
         <p:spPr>
           <a:xfrm>
-            <a:off x="1215564" y="1783080"/>
-            <a:ext cx="9760567" cy="4270248"/>
+            <a:off x="2246610" y="1783080"/>
+            <a:ext cx="7698475" cy="4270248"/>
           </a:xfrm>
           <a:prstGeom prst="rect">
             <a:avLst/>
@@ -8252,7 +8341,7 @@
                 <a:ea typeface="Times New Roman" pitchFamily="34" charset="-122"/>
                 <a:cs typeface="Times New Roman" pitchFamily="34" charset="-120"/>
               </a:rPr>
-              <a:t>Birth and death rates.</a:t>
+              <a:t>A newborn baby.</a:t>
             </a:r>
             <a:endParaRPr lang="en-US" sz="1800" dirty="0"/>
           </a:p>
@@ -8471,7 +8560,7 @@
                 <a:ea typeface="Times New Roman" pitchFamily="34" charset="-122"/>
                 <a:cs typeface="Times New Roman" pitchFamily="34" charset="-120"/>
               </a:rPr>
-              <a:t>What is the birth rate?</a:t>
+              <a:t>How do we compare the births of a big town and a small town fairly?</a:t>
             </a:r>
             <a:endParaRPr lang="en-US" sz="4000" dirty="0"/>
           </a:p>
@@ -9285,7 +9374,7 @@
                 <a:ea typeface="Times New Roman" pitchFamily="34" charset="-122"/>
                 <a:cs typeface="Times New Roman" pitchFamily="34" charset="-120"/>
               </a:rPr>
-              <a:t>The number of births per 1,000 people in one year.</a:t>
+              <a:t>We count the births for every 1,000 people: this is the birth rate.</a:t>
             </a:r>
             <a:endParaRPr lang="en-US" sz="4000" dirty="0"/>
           </a:p>
@@ -9444,7 +9533,7 @@
       </p:sp>
       <p:pic>
         <p:nvPicPr>
-          <p:cNvPr id="4" name="Image 0" descr="/home/claude/f4/img/v2/usa_newborn.jpg">    </p:cNvPr>
+          <p:cNvPr id="4" name="Image 0" descr="/home/claude/f4/img/v2/pw_indices_big.png">    </p:cNvPr>
           <p:cNvPicPr>
             <a:picLocks noChangeAspect="1"/>
           </p:cNvPicPr>
@@ -9458,8 +9547,8 @@
         </p:blipFill>
         <p:spPr>
           <a:xfrm>
-            <a:off x="2246610" y="1783080"/>
-            <a:ext cx="7698475" cy="4270248"/>
+            <a:off x="629930" y="1783080"/>
+            <a:ext cx="10931835" cy="4270248"/>
           </a:xfrm>
           <a:prstGeom prst="rect">
             <a:avLst/>
@@ -9499,7 +9588,7 @@
                 <a:ea typeface="Times New Roman" pitchFamily="34" charset="-122"/>
                 <a:cs typeface="Times New Roman" pitchFamily="34" charset="-120"/>
               </a:rPr>
-              <a:t>A newborn baby.</a:t>
+              <a:t>Calculating indices.</a:t>
             </a:r>
             <a:endParaRPr lang="en-US" sz="1800" dirty="0"/>
           </a:p>
@@ -10151,7 +10240,7 @@
                 <a:ea typeface="Times New Roman" pitchFamily="34" charset="-122"/>
                 <a:cs typeface="Times New Roman" pitchFamily="34" charset="-120"/>
               </a:rPr>
-              <a:t>Calculating demographic indices.</a:t>
+              <a:t>Calculating indices.</a:t>
             </a:r>
             <a:endParaRPr lang="en-US" sz="1800" dirty="0"/>
           </a:p>
@@ -11924,7 +12013,7 @@
                           <a:ea typeface="Calibri" pitchFamily="34" charset="-122"/>
                           <a:cs typeface="Calibri" pitchFamily="34" charset="-120"/>
                         </a:rPr>
-                        <a:t>Birth rate, death rate, natural growth rate, per thousand (‰), per cent (%).</a:t>
+                        <a:t>Birth rate, death rate, natural growth rate.</a:t>
                       </a:r>
                       <a:endParaRPr lang="en-US" sz="1700" dirty="0">
                         <a:latin typeface="Calibri" charset="0"/>
@@ -12062,7 +12151,7 @@
                           <a:ea typeface="Calibri" pitchFamily="34" charset="-122"/>
                           <a:cs typeface="Calibri" pitchFamily="34" charset="-120"/>
                         </a:rPr>
-                        <a:t>Recall of the definitions of birth rate, death rate and natural growth rate; calculation of these indices with concrete data.</a:t>
+                        <a:t>Theoretical basis: recall of the definitions of birth rate, death rate and natural growth rate. Practical exercise: calculation of the indices (birth rate, death rate and natural increase) with concrete data.</a:t>
                       </a:r>
                       <a:endParaRPr lang="en-US" sz="1700" dirty="0">
                         <a:latin typeface="Calibri" charset="0"/>
@@ -12683,7 +12772,7 @@
                 <a:ea typeface="Times New Roman" pitchFamily="34" charset="-122"/>
                 <a:cs typeface="Times New Roman" pitchFamily="34" charset="-120"/>
               </a:rPr>
-              <a:t>What does the graph show about Cameroon?</a:t>
+              <a:t>Which rate has fallen faster in Cameroon: the birth rate or the death rate?</a:t>
             </a:r>
             <a:endParaRPr lang="en-US" sz="4000" dirty="0"/>
           </a:p>
@@ -12902,7 +12991,7 @@
                 <a:ea typeface="Times New Roman" pitchFamily="34" charset="-122"/>
                 <a:cs typeface="Times New Roman" pitchFamily="34" charset="-120"/>
               </a:rPr>
-              <a:t>The death rate has fallen faster than the birth rate, so the population grows quickly.</a:t>
+              <a:t>The death rate, so the population grows quickly.</a:t>
             </a:r>
             <a:endParaRPr lang="en-US" sz="4000" dirty="0"/>
           </a:p>
@@ -13808,9 +13897,129 @@
           </a:p>
         </p:txBody>
       </p:sp>
+      <p:sp>
+        <p:nvSpPr>
+          <p:cNvPr id="3" name="Text 1"/>
+          <p:cNvSpPr/>
+          <p:nvPr/>
+        </p:nvSpPr>
+        <p:spPr>
+          <a:xfrm>
+            <a:off x="365760" y="1005840"/>
+            <a:ext cx="11460175" cy="731520"/>
+          </a:xfrm>
+          <a:prstGeom prst="rect">
+            <a:avLst/>
+          </a:prstGeom>
+          <a:noFill/>
+          <a:ln/>
+        </p:spPr>
+        <p:txBody>
+          <a:bodyPr wrap="square" lIns="0" tIns="0" rIns="0" bIns="0" rtlCol="0" anchor="ctr">
+            <a:normAutofit/>
+          </a:bodyPr>
+          <a:lstStyle/>
+          <a:p>
+            <a:pPr algn="ctr" indent="0" marL="0">
+              <a:buNone/>
+            </a:pPr>
+            <a:r>
+              <a:rPr lang="en-US" sz="3600" b="1" dirty="0">
+                <a:solidFill>
+                  <a:srgbClr val="990011"/>
+                </a:solidFill>
+                <a:latin typeface="Times New Roman" pitchFamily="34" charset="0"/>
+                <a:ea typeface="Times New Roman" pitchFamily="34" charset="-122"/>
+                <a:cs typeface="Times New Roman" pitchFamily="34" charset="-120"/>
+              </a:rPr>
+              <a:t>1. Formulas</a:t>
+            </a:r>
+            <a:endParaRPr lang="en-US" sz="3600" dirty="0"/>
+          </a:p>
+        </p:txBody>
+      </p:sp>
+      <p:sp>
+        <p:nvSpPr>
+          <p:cNvPr id="4" name="Text 2"/>
+          <p:cNvSpPr/>
+          <p:nvPr/>
+        </p:nvSpPr>
+        <p:spPr>
+          <a:xfrm>
+            <a:off x="365760" y="1783080"/>
+            <a:ext cx="4846320" cy="4617720"/>
+          </a:xfrm>
+          <a:prstGeom prst="rect">
+            <a:avLst/>
+          </a:prstGeom>
+          <a:noFill/>
+          <a:ln/>
+        </p:spPr>
+        <p:txBody>
+          <a:bodyPr wrap="square" lIns="0" tIns="0" rIns="0" bIns="0" rtlCol="0" anchor="t"/>
+          <a:lstStyle/>
+          <a:p>
+            <a:pPr algn="l" indent="0" marL="0">
+              <a:spcAft>
+                <a:spcPts val="800"/>
+              </a:spcAft>
+              <a:buNone/>
+            </a:pPr>
+            <a:r>
+              <a:rPr lang="en-US" sz="3600" i="1" dirty="0">
+                <a:solidFill>
+                  <a:srgbClr val="111111"/>
+                </a:solidFill>
+                <a:latin typeface="Times New Roman" pitchFamily="34" charset="0"/>
+                <a:ea typeface="Times New Roman" pitchFamily="34" charset="-122"/>
+                <a:cs typeface="Times New Roman" pitchFamily="34" charset="-120"/>
+              </a:rPr>
+              <a:t>The demographic indices are calculated with the following formulas:</a:t>
+            </a:r>
+            <a:endParaRPr lang="en-US" sz="3600" dirty="0"/>
+          </a:p>
+          <a:p>
+            <a:pPr algn="l" indent="0" marL="0">
+              <a:spcAft>
+                <a:spcPts val="800"/>
+              </a:spcAft>
+              <a:buNone/>
+            </a:pPr>
+            <a:r>
+              <a:rPr lang="en-US" sz="3600" b="1" dirty="0">
+                <a:solidFill>
+                  <a:srgbClr val="111111"/>
+                </a:solidFill>
+                <a:latin typeface="Times New Roman" pitchFamily="34" charset="0"/>
+                <a:ea typeface="Times New Roman" pitchFamily="34" charset="-122"/>
+                <a:cs typeface="Times New Roman" pitchFamily="34" charset="-120"/>
+              </a:rPr>
+              <a:t>Birth rate: </a:t>
+            </a:r>
+            <a:pPr algn="l" indent="0" marL="0">
+              <a:spcAft>
+                <a:spcPts val="800"/>
+              </a:spcAft>
+              <a:buNone/>
+            </a:pPr>
+            <a:r>
+              <a:rPr lang="en-US" sz="3600" dirty="0">
+                <a:solidFill>
+                  <a:srgbClr val="111111"/>
+                </a:solidFill>
+                <a:latin typeface="Times New Roman" pitchFamily="34" charset="0"/>
+                <a:ea typeface="Times New Roman" pitchFamily="34" charset="-122"/>
+                <a:cs typeface="Times New Roman" pitchFamily="34" charset="-120"/>
+              </a:rPr>
+              <a:t>Birth rate = (births ÷ population) × 1,000, in ‰.</a:t>
+            </a:r>
+            <a:endParaRPr lang="en-US" sz="3600" dirty="0"/>
+          </a:p>
+        </p:txBody>
+      </p:sp>
       <p:pic>
         <p:nvPicPr>
-          <p:cNvPr id="3" name="Image 0" descr="/home/claude/f4/img/minesec_sheet.png">    </p:cNvPr>
+          <p:cNvPr id="5" name="Image 0" descr="/home/claude/f4/img/v2/pw_indices_big.png">    </p:cNvPr>
           <p:cNvPicPr>
             <a:picLocks noChangeAspect="1"/>
           </p:cNvPicPr>
@@ -13824,8 +14033,8 @@
         </p:blipFill>
         <p:spPr>
           <a:xfrm>
-            <a:off x="0" y="658368"/>
-            <a:ext cx="3840480" cy="5833872"/>
+            <a:off x="5349240" y="2617506"/>
+            <a:ext cx="6659575" cy="2601397"/>
           </a:xfrm>
           <a:prstGeom prst="rect">
             <a:avLst/>
@@ -13834,14 +14043,14 @@
       </p:pic>
       <p:sp>
         <p:nvSpPr>
-          <p:cNvPr id="4" name="Text 1"/>
+          <p:cNvPr id="6" name="Text 3"/>
           <p:cNvSpPr/>
           <p:nvPr/>
         </p:nvSpPr>
         <p:spPr>
           <a:xfrm>
-            <a:off x="4069080" y="1005840"/>
-            <a:ext cx="7802575" cy="731520"/>
+            <a:off x="5349240" y="6089904"/>
+            <a:ext cx="6659575" cy="347472"/>
           </a:xfrm>
           <a:prstGeom prst="rect">
             <a:avLst/>
@@ -13850,142 +14059,24 @@
           <a:ln/>
         </p:spPr>
         <p:txBody>
-          <a:bodyPr wrap="square" lIns="0" tIns="0" rIns="0" bIns="0" rtlCol="0" anchor="ctr">
-            <a:normAutofit/>
-          </a:bodyPr>
+          <a:bodyPr wrap="square" lIns="0" tIns="0" rIns="0" bIns="0" rtlCol="0" anchor="ctr"/>
           <a:lstStyle/>
           <a:p>
             <a:pPr algn="ctr" indent="0" marL="0">
               <a:buNone/>
             </a:pPr>
             <a:r>
-              <a:rPr lang="en-US" sz="3600" b="1" dirty="0">
-                <a:solidFill>
-                  <a:srgbClr val="990011"/>
+              <a:rPr lang="en-US" sz="1600" i="1" dirty="0">
+                <a:solidFill>
+                  <a:srgbClr val="555555"/>
                 </a:solidFill>
                 <a:latin typeface="Times New Roman" pitchFamily="34" charset="0"/>
                 <a:ea typeface="Times New Roman" pitchFamily="34" charset="-122"/>
                 <a:cs typeface="Times New Roman" pitchFamily="34" charset="-120"/>
               </a:rPr>
-              <a:t>1. Formulas</a:t>
-            </a:r>
-            <a:endParaRPr lang="en-US" sz="3600" dirty="0"/>
-          </a:p>
-        </p:txBody>
-      </p:sp>
-      <p:sp>
-        <p:nvSpPr>
-          <p:cNvPr id="5" name="Text 2"/>
-          <p:cNvSpPr/>
-          <p:nvPr/>
-        </p:nvSpPr>
-        <p:spPr>
-          <a:xfrm>
-            <a:off x="4069080" y="1783080"/>
-            <a:ext cx="7802575" cy="4663440"/>
-          </a:xfrm>
-          <a:prstGeom prst="rect">
-            <a:avLst/>
-          </a:prstGeom>
-          <a:noFill/>
-          <a:ln/>
-        </p:spPr>
-        <p:txBody>
-          <a:bodyPr wrap="square" lIns="0" tIns="0" rIns="0" bIns="0" rtlCol="0" anchor="t"/>
-          <a:lstStyle/>
-          <a:p>
-            <a:pPr algn="l" indent="0" marL="0">
-              <a:spcAft>
-                <a:spcPts val="800"/>
-              </a:spcAft>
-              <a:buNone/>
-            </a:pPr>
-            <a:r>
-              <a:rPr lang="en-US" sz="4000" i="1" dirty="0">
-                <a:solidFill>
-                  <a:srgbClr val="111111"/>
-                </a:solidFill>
-                <a:latin typeface="Times New Roman" pitchFamily="34" charset="0"/>
-                <a:ea typeface="Times New Roman" pitchFamily="34" charset="-122"/>
-                <a:cs typeface="Times New Roman" pitchFamily="34" charset="-120"/>
-              </a:rPr>
-              <a:t>The demographic indices are calculated as follows:</a:t>
-            </a:r>
-            <a:endParaRPr lang="en-US" sz="4000" dirty="0"/>
-          </a:p>
-          <a:p>
-            <a:pPr algn="l" indent="0" marL="0">
-              <a:spcAft>
-                <a:spcPts val="800"/>
-              </a:spcAft>
-              <a:buNone/>
-            </a:pPr>
-            <a:r>
-              <a:rPr lang="en-US" sz="4000" b="1" dirty="0">
-                <a:solidFill>
-                  <a:srgbClr val="111111"/>
-                </a:solidFill>
-                <a:latin typeface="Times New Roman" pitchFamily="34" charset="0"/>
-                <a:ea typeface="Times New Roman" pitchFamily="34" charset="-122"/>
-                <a:cs typeface="Times New Roman" pitchFamily="34" charset="-120"/>
-              </a:rPr>
-              <a:t>Birth rate: </a:t>
-            </a:r>
-            <a:pPr algn="l" indent="0" marL="0">
-              <a:spcAft>
-                <a:spcPts val="800"/>
-              </a:spcAft>
-              <a:buNone/>
-            </a:pPr>
-            <a:r>
-              <a:rPr lang="en-US" sz="4000" dirty="0">
-                <a:solidFill>
-                  <a:srgbClr val="111111"/>
-                </a:solidFill>
-                <a:latin typeface="Times New Roman" pitchFamily="34" charset="0"/>
-                <a:ea typeface="Times New Roman" pitchFamily="34" charset="-122"/>
-                <a:cs typeface="Times New Roman" pitchFamily="34" charset="-120"/>
-              </a:rPr>
-              <a:t>Birth rate = (births ÷ population) × 1,000, in ‰.</a:t>
-            </a:r>
-            <a:endParaRPr lang="en-US" sz="4000" dirty="0"/>
-          </a:p>
-          <a:p>
-            <a:pPr algn="l" indent="0" marL="0">
-              <a:spcAft>
-                <a:spcPts val="800"/>
-              </a:spcAft>
-              <a:buNone/>
-            </a:pPr>
-            <a:r>
-              <a:rPr lang="en-US" sz="4000" b="1" dirty="0">
-                <a:solidFill>
-                  <a:srgbClr val="111111"/>
-                </a:solidFill>
-                <a:latin typeface="Times New Roman" pitchFamily="34" charset="0"/>
-                <a:ea typeface="Times New Roman" pitchFamily="34" charset="-122"/>
-                <a:cs typeface="Times New Roman" pitchFamily="34" charset="-120"/>
-              </a:rPr>
-              <a:t>Death rate: </a:t>
-            </a:r>
-            <a:pPr algn="l" indent="0" marL="0">
-              <a:spcAft>
-                <a:spcPts val="800"/>
-              </a:spcAft>
-              <a:buNone/>
-            </a:pPr>
-            <a:r>
-              <a:rPr lang="en-US" sz="4000" dirty="0">
-                <a:solidFill>
-                  <a:srgbClr val="111111"/>
-                </a:solidFill>
-                <a:latin typeface="Times New Roman" pitchFamily="34" charset="0"/>
-                <a:ea typeface="Times New Roman" pitchFamily="34" charset="-122"/>
-                <a:cs typeface="Times New Roman" pitchFamily="34" charset="-120"/>
-              </a:rPr>
-              <a:t>Death rate = (deaths ÷ population) × 1,000, in ‰.</a:t>
-            </a:r>
-            <a:endParaRPr lang="en-US" sz="4000" dirty="0"/>
+              <a:t>Illustration: formulas and example</a:t>
+            </a:r>
+            <a:endParaRPr lang="en-US" sz="1600" dirty="0"/>
           </a:p>
         </p:txBody>
       </p:sp>
@@ -14160,7 +14251,7 @@
                 <a:ea typeface="Times New Roman" pitchFamily="34" charset="-122"/>
                 <a:cs typeface="Times New Roman" pitchFamily="34" charset="-120"/>
               </a:rPr>
-              <a:t>1. Formulas (continued)</a:t>
+              <a:t>1. Formulas</a:t>
             </a:r>
             <a:endParaRPr lang="en-US" sz="3600" dirty="0"/>
           </a:p>
@@ -14186,6 +14277,43 @@
         <p:txBody>
           <a:bodyPr wrap="square" lIns="0" tIns="0" rIns="0" bIns="0" rtlCol="0" anchor="t"/>
           <a:lstStyle/>
+          <a:p>
+            <a:pPr algn="l" indent="0" marL="0">
+              <a:spcAft>
+                <a:spcPts val="800"/>
+              </a:spcAft>
+              <a:buNone/>
+            </a:pPr>
+            <a:r>
+              <a:rPr lang="en-US" sz="4000" b="1" dirty="0">
+                <a:solidFill>
+                  <a:srgbClr val="111111"/>
+                </a:solidFill>
+                <a:latin typeface="Times New Roman" pitchFamily="34" charset="0"/>
+                <a:ea typeface="Times New Roman" pitchFamily="34" charset="-122"/>
+                <a:cs typeface="Times New Roman" pitchFamily="34" charset="-120"/>
+              </a:rPr>
+              <a:t>Death rate: </a:t>
+            </a:r>
+            <a:pPr algn="l" indent="0" marL="0">
+              <a:spcAft>
+                <a:spcPts val="800"/>
+              </a:spcAft>
+              <a:buNone/>
+            </a:pPr>
+            <a:r>
+              <a:rPr lang="en-US" sz="4000" dirty="0">
+                <a:solidFill>
+                  <a:srgbClr val="111111"/>
+                </a:solidFill>
+                <a:latin typeface="Times New Roman" pitchFamily="34" charset="0"/>
+                <a:ea typeface="Times New Roman" pitchFamily="34" charset="-122"/>
+                <a:cs typeface="Times New Roman" pitchFamily="34" charset="-120"/>
+              </a:rPr>
+              <a:t>Death rate = (deaths ÷ population) × 1,000, in ‰.</a:t>
+            </a:r>
+            <a:endParaRPr lang="en-US" sz="4000" dirty="0"/>
+          </a:p>
           <a:p>
             <a:pPr algn="l" indent="0" marL="0">
               <a:spcAft>
@@ -15113,8 +15241,8 @@
         </p:nvSpPr>
         <p:spPr>
           <a:xfrm>
-            <a:off x="457200" y="1005840"/>
-            <a:ext cx="11277295" cy="731520"/>
+            <a:off x="365760" y="1005840"/>
+            <a:ext cx="11460175" cy="731520"/>
           </a:xfrm>
           <a:prstGeom prst="rect">
             <a:avLst/>
@@ -15123,7 +15251,9 @@
           <a:ln/>
         </p:spPr>
         <p:txBody>
-          <a:bodyPr wrap="square" lIns="0" tIns="0" rIns="0" bIns="0" rtlCol="0" anchor="ctr"/>
+          <a:bodyPr wrap="square" lIns="0" tIns="0" rIns="0" bIns="0" rtlCol="0" anchor="ctr">
+            <a:normAutofit/>
+          </a:bodyPr>
           <a:lstStyle/>
           <a:p>
             <a:pPr algn="ctr" indent="0" marL="0">
@@ -15138,7 +15268,86 @@
                 <a:ea typeface="Times New Roman" pitchFamily="34" charset="-122"/>
                 <a:cs typeface="Times New Roman" pitchFamily="34" charset="-120"/>
               </a:rPr>
-              <a:t>2. Worked Example</a:t>
+              <a:t>3. The Case of Cameroon</a:t>
+            </a:r>
+            <a:endParaRPr lang="en-US" sz="3600" dirty="0"/>
+          </a:p>
+        </p:txBody>
+      </p:sp>
+      <p:sp>
+        <p:nvSpPr>
+          <p:cNvPr id="4" name="Text 2"/>
+          <p:cNvSpPr/>
+          <p:nvPr/>
+        </p:nvSpPr>
+        <p:spPr>
+          <a:xfrm>
+            <a:off x="365760" y="1783080"/>
+            <a:ext cx="4846320" cy="4617720"/>
+          </a:xfrm>
+          <a:prstGeom prst="rect">
+            <a:avLst/>
+          </a:prstGeom>
+          <a:noFill/>
+          <a:ln/>
+        </p:spPr>
+        <p:txBody>
+          <a:bodyPr wrap="square" lIns="0" tIns="0" rIns="0" bIns="0" rtlCol="0" anchor="t"/>
+          <a:lstStyle/>
+          <a:p>
+            <a:pPr algn="l" indent="0" marL="0">
+              <a:spcAft>
+                <a:spcPts val="800"/>
+              </a:spcAft>
+              <a:buNone/>
+            </a:pPr>
+            <a:r>
+              <a:rPr lang="en-US" sz="3600" i="1" dirty="0">
+                <a:solidFill>
+                  <a:srgbClr val="111111"/>
+                </a:solidFill>
+                <a:latin typeface="Times New Roman" pitchFamily="34" charset="0"/>
+                <a:ea typeface="Times New Roman" pitchFamily="34" charset="-122"/>
+                <a:cs typeface="Times New Roman" pitchFamily="34" charset="-120"/>
+              </a:rPr>
+              <a:t>The indices of Cameroon are the following (approximate):</a:t>
+            </a:r>
+            <a:endParaRPr lang="en-US" sz="3600" dirty="0"/>
+          </a:p>
+          <a:p>
+            <a:pPr algn="l" indent="0" marL="0">
+              <a:spcAft>
+                <a:spcPts val="800"/>
+              </a:spcAft>
+              <a:buNone/>
+            </a:pPr>
+            <a:r>
+              <a:rPr lang="en-US" sz="3600" b="1" dirty="0">
+                <a:solidFill>
+                  <a:srgbClr val="111111"/>
+                </a:solidFill>
+                <a:latin typeface="Times New Roman" pitchFamily="34" charset="0"/>
+                <a:ea typeface="Times New Roman" pitchFamily="34" charset="-122"/>
+                <a:cs typeface="Times New Roman" pitchFamily="34" charset="-120"/>
+              </a:rPr>
+              <a:t>Birth rate: </a:t>
+            </a:r>
+            <a:pPr algn="l" indent="0" marL="0">
+              <a:spcAft>
+                <a:spcPts val="800"/>
+              </a:spcAft>
+              <a:buNone/>
+            </a:pPr>
+            <a:r>
+              <a:rPr lang="en-US" sz="3600" dirty="0">
+                <a:solidFill>
+                  <a:srgbClr val="111111"/>
+                </a:solidFill>
+                <a:latin typeface="Times New Roman" pitchFamily="34" charset="0"/>
+                <a:ea typeface="Times New Roman" pitchFamily="34" charset="-122"/>
+                <a:cs typeface="Times New Roman" pitchFamily="34" charset="-120"/>
+              </a:rPr>
+              <a:t>It is about 35 ‰.</a:t>
             </a:r>
             <a:endParaRPr lang="en-US" sz="3600" dirty="0"/>
           </a:p>
@@ -15146,7 +15355,7 @@
       </p:sp>
       <p:pic>
         <p:nvPicPr>
-          <p:cNvPr id="4" name="Image 0" descr="/home/claude/f4/img/v2/pw_indices_big.png">    </p:cNvPr>
+          <p:cNvPr id="5" name="Image 0" descr="/home/claude/f4/img/v2/cmr_rates_big.png">    </p:cNvPr>
           <p:cNvPicPr>
             <a:picLocks noChangeAspect="1"/>
           </p:cNvPicPr>
@@ -15160,8 +15369,8 @@
         </p:blipFill>
         <p:spPr>
           <a:xfrm>
-            <a:off x="629930" y="1783080"/>
-            <a:ext cx="10931835" cy="4270248"/>
+            <a:off x="5349240" y="2461422"/>
+            <a:ext cx="6659575" cy="2913564"/>
           </a:xfrm>
           <a:prstGeom prst="rect">
             <a:avLst/>
@@ -15170,14 +15379,14 @@
       </p:pic>
       <p:sp>
         <p:nvSpPr>
-          <p:cNvPr id="5" name="Text 2"/>
+          <p:cNvPr id="6" name="Text 3"/>
           <p:cNvSpPr/>
           <p:nvPr/>
         </p:nvSpPr>
         <p:spPr>
           <a:xfrm>
-            <a:off x="457200" y="6089904"/>
-            <a:ext cx="11277295" cy="347472"/>
+            <a:off x="5349240" y="6089904"/>
+            <a:ext cx="6659575" cy="347472"/>
           </a:xfrm>
           <a:prstGeom prst="rect">
             <a:avLst/>
@@ -15193,7 +15402,7 @@
               <a:buNone/>
             </a:pPr>
             <a:r>
-              <a:rPr lang="en-US" sz="1800" i="1" dirty="0">
+              <a:rPr lang="en-US" sz="1600" i="1" dirty="0">
                 <a:solidFill>
                   <a:srgbClr val="555555"/>
                 </a:solidFill>
@@ -15201,9 +15410,9 @@
                 <a:ea typeface="Times New Roman" pitchFamily="34" charset="-122"/>
                 <a:cs typeface="Times New Roman" pitchFamily="34" charset="-120"/>
               </a:rPr>
-              <a:t>Illustration: calculating demographic indices</a:t>
-            </a:r>
-            <a:endParaRPr lang="en-US" sz="1800" dirty="0"/>
+              <a:t>Illustration: birth and death rates of Cameroon</a:t>
+            </a:r>
+            <a:endParaRPr lang="en-US" sz="1600" dirty="0"/>
           </a:p>
         </p:txBody>
       </p:sp>
@@ -15313,7 +15522,7 @@
                 <a:ea typeface="Calibri" pitchFamily="34" charset="-122"/>
                 <a:cs typeface="Calibri" pitchFamily="34" charset="-120"/>
               </a:rPr>
-              <a:t>FORMATIVE EVALUATION</a:t>
+              <a:t>BOARD SUMMARY</a:t>
             </a:r>
             <a:endParaRPr lang="en-US" sz="1400" dirty="0"/>
           </a:p>
@@ -15378,7 +15587,7 @@
                 <a:ea typeface="Times New Roman" pitchFamily="34" charset="-122"/>
                 <a:cs typeface="Times New Roman" pitchFamily="34" charset="-120"/>
               </a:rPr>
-              <a:t>Evaluation 1</a:t>
+              <a:t>3. The Case of Cameroon</a:t>
             </a:r>
             <a:endParaRPr lang="en-US" sz="3600" dirty="0"/>
           </a:p>
@@ -15412,7 +15621,7 @@
               <a:buNone/>
             </a:pPr>
             <a:r>
-              <a:rPr lang="en-US" sz="4000" dirty="0">
+              <a:rPr lang="en-US" sz="4000" b="1" dirty="0">
                 <a:solidFill>
                   <a:srgbClr val="111111"/>
                 </a:solidFill>
@@ -15420,7 +15629,61 @@
                 <a:ea typeface="Times New Roman" pitchFamily="34" charset="-122"/>
                 <a:cs typeface="Times New Roman" pitchFamily="34" charset="-120"/>
               </a:rPr>
-              <a:t>A population of 50,000 has 2,000 births. Find the birth rate.</a:t>
+              <a:t>Death rate: </a:t>
+            </a:r>
+            <a:pPr algn="l" indent="0" marL="0">
+              <a:spcAft>
+                <a:spcPts val="800"/>
+              </a:spcAft>
+              <a:buNone/>
+            </a:pPr>
+            <a:r>
+              <a:rPr lang="en-US" sz="4000" dirty="0">
+                <a:solidFill>
+                  <a:srgbClr val="111111"/>
+                </a:solidFill>
+                <a:latin typeface="Times New Roman" pitchFamily="34" charset="0"/>
+                <a:ea typeface="Times New Roman" pitchFamily="34" charset="-122"/>
+                <a:cs typeface="Times New Roman" pitchFamily="34" charset="-120"/>
+              </a:rPr>
+              <a:t>It is about 9 ‰.</a:t>
+            </a:r>
+            <a:endParaRPr lang="en-US" sz="4000" dirty="0"/>
+          </a:p>
+          <a:p>
+            <a:pPr algn="l" indent="0" marL="0">
+              <a:spcAft>
+                <a:spcPts val="800"/>
+              </a:spcAft>
+              <a:buNone/>
+            </a:pPr>
+            <a:r>
+              <a:rPr lang="en-US" sz="4000" b="1" dirty="0">
+                <a:solidFill>
+                  <a:srgbClr val="111111"/>
+                </a:solidFill>
+                <a:latin typeface="Times New Roman" pitchFamily="34" charset="0"/>
+                <a:ea typeface="Times New Roman" pitchFamily="34" charset="-122"/>
+                <a:cs typeface="Times New Roman" pitchFamily="34" charset="-120"/>
+              </a:rPr>
+              <a:t>Natural growth rate: </a:t>
+            </a:r>
+            <a:pPr algn="l" indent="0" marL="0">
+              <a:spcAft>
+                <a:spcPts val="800"/>
+              </a:spcAft>
+              <a:buNone/>
+            </a:pPr>
+            <a:r>
+              <a:rPr lang="en-US" sz="4000" dirty="0">
+                <a:solidFill>
+                  <a:srgbClr val="111111"/>
+                </a:solidFill>
+                <a:latin typeface="Times New Roman" pitchFamily="34" charset="0"/>
+                <a:ea typeface="Times New Roman" pitchFamily="34" charset="-122"/>
+                <a:cs typeface="Times New Roman" pitchFamily="34" charset="-120"/>
+              </a:rPr>
+              <a:t>It is about 2.6 %, so the population of Cameroon grows quickly.</a:t>
             </a:r>
             <a:endParaRPr lang="en-US" sz="4000" dirty="0"/>
           </a:p>
@@ -15597,7 +15860,7 @@
                 <a:ea typeface="Times New Roman" pitchFamily="34" charset="-122"/>
                 <a:cs typeface="Times New Roman" pitchFamily="34" charset="-120"/>
               </a:rPr>
-              <a:t>Expected Answer</a:t>
+              <a:t>Evaluation 1</a:t>
             </a:r>
             <a:endParaRPr lang="en-US" sz="3600" dirty="0"/>
           </a:p>
@@ -15639,7 +15902,7 @@
                 <a:ea typeface="Times New Roman" pitchFamily="34" charset="-122"/>
                 <a:cs typeface="Times New Roman" pitchFamily="34" charset="-120"/>
               </a:rPr>
-              <a:t>(2,000 ÷ 50,000) × 1,000 = 40 ‰.</a:t>
+              <a:t>A population of 50,000 has 2,000 births. Find the birth rate.</a:t>
             </a:r>
             <a:endParaRPr lang="en-US" sz="4000" dirty="0"/>
           </a:p>
@@ -15816,7 +16079,7 @@
                 <a:ea typeface="Times New Roman" pitchFamily="34" charset="-122"/>
                 <a:cs typeface="Times New Roman" pitchFamily="34" charset="-120"/>
               </a:rPr>
-              <a:t>Evaluation 2</a:t>
+              <a:t>Expected Answer</a:t>
             </a:r>
             <a:endParaRPr lang="en-US" sz="3600" dirty="0"/>
           </a:p>
@@ -15858,7 +16121,7 @@
                 <a:ea typeface="Times New Roman" pitchFamily="34" charset="-122"/>
                 <a:cs typeface="Times New Roman" pitchFamily="34" charset="-120"/>
               </a:rPr>
-              <a:t>Birth rate 38 ‰, death rate 10 ‰. Find the natural growth rate.</a:t>
+              <a:t>(2,000 ÷ 50,000) × 1,000 = 40 ‰.</a:t>
             </a:r>
             <a:endParaRPr lang="en-US" sz="4000" dirty="0"/>
           </a:p>
@@ -16035,7 +16298,7 @@
                 <a:ea typeface="Times New Roman" pitchFamily="34" charset="-122"/>
                 <a:cs typeface="Times New Roman" pitchFamily="34" charset="-120"/>
               </a:rPr>
-              <a:t>Expected Answer</a:t>
+              <a:t>Evaluation 2</a:t>
             </a:r>
             <a:endParaRPr lang="en-US" sz="3600" dirty="0"/>
           </a:p>
@@ -16077,7 +16340,7 @@
                 <a:ea typeface="Times New Roman" pitchFamily="34" charset="-122"/>
                 <a:cs typeface="Times New Roman" pitchFamily="34" charset="-120"/>
               </a:rPr>
-              <a:t>(38 − 10) ÷ 10 = 2.8 %.</a:t>
+              <a:t>Birth rate 38 ‰, death rate 10 ‰. Find the natural growth rate.</a:t>
             </a:r>
             <a:endParaRPr lang="en-US" sz="4000" dirty="0"/>
           </a:p>
@@ -16189,7 +16452,7 @@
                 <a:ea typeface="Calibri" pitchFamily="34" charset="-122"/>
                 <a:cs typeface="Calibri" pitchFamily="34" charset="-120"/>
               </a:rPr>
-              <a:t>REMEDIATION</a:t>
+              <a:t>FORMATIVE EVALUATION</a:t>
             </a:r>
             <a:endParaRPr lang="en-US" sz="1400" dirty="0"/>
           </a:p>
@@ -16212,7 +16475,7 @@
         <p:spPr>
           <a:xfrm>
             <a:off x="0" y="658368"/>
-            <a:ext cx="1463040" cy="5833872"/>
+            <a:ext cx="5120640" cy="5833872"/>
           </a:xfrm>
           <a:prstGeom prst="rect">
             <a:avLst/>
@@ -16227,8 +16490,8 @@
         </p:nvSpPr>
         <p:spPr>
           <a:xfrm>
-            <a:off x="1691640" y="1005840"/>
-            <a:ext cx="10180015" cy="731520"/>
+            <a:off x="5349240" y="1005840"/>
+            <a:ext cx="6522415" cy="731520"/>
           </a:xfrm>
           <a:prstGeom prst="rect">
             <a:avLst/>
@@ -16254,7 +16517,7 @@
                 <a:ea typeface="Times New Roman" pitchFamily="34" charset="-122"/>
                 <a:cs typeface="Times New Roman" pitchFamily="34" charset="-120"/>
               </a:rPr>
-              <a:t>Remediation</a:t>
+              <a:t>Expected Answer</a:t>
             </a:r>
             <a:endParaRPr lang="en-US" sz="3600" dirty="0"/>
           </a:p>
@@ -16268,8 +16531,8 @@
         </p:nvSpPr>
         <p:spPr>
           <a:xfrm>
-            <a:off x="1691640" y="1783080"/>
-            <a:ext cx="10180015" cy="4663440"/>
+            <a:off x="5349240" y="1783080"/>
+            <a:ext cx="6522415" cy="4663440"/>
           </a:xfrm>
           <a:prstGeom prst="rect">
             <a:avLst/>
@@ -16288,7 +16551,7 @@
               <a:buNone/>
             </a:pPr>
             <a:r>
-              <a:rPr lang="en-US" sz="4000" b="1" dirty="0">
+              <a:rPr lang="en-US" sz="4000" dirty="0">
                 <a:solidFill>
                   <a:srgbClr val="111111"/>
                 </a:solidFill>
@@ -16296,73 +16559,7 @@
                 <a:ea typeface="Times New Roman" pitchFamily="34" charset="-122"/>
                 <a:cs typeface="Times New Roman" pitchFamily="34" charset="-120"/>
               </a:rPr>
-              <a:t>Fill in the blanks:</a:t>
-            </a:r>
-            <a:endParaRPr lang="en-US" sz="4000" dirty="0"/>
-          </a:p>
-          <a:p>
-            <a:pPr algn="l" marL="342900" indent="-342900">
-              <a:spcAft>
-                <a:spcPts val="800"/>
-              </a:spcAft>
-              <a:buSzPct val="100000"/>
-              <a:buFont typeface="+mj-lt"/>
-              <a:buAutoNum type="arabicPeriod" startAt="1"/>
-            </a:pPr>
-            <a:r>
-              <a:rPr lang="en-US" sz="4000" dirty="0">
-                <a:solidFill>
-                  <a:srgbClr val="111111"/>
-                </a:solidFill>
-                <a:latin typeface="Times New Roman" pitchFamily="34" charset="0"/>
-                <a:ea typeface="Times New Roman" pitchFamily="34" charset="-122"/>
-                <a:cs typeface="Times New Roman" pitchFamily="34" charset="-120"/>
-              </a:rPr>
-              <a:t>Birth and death rates are given per ______.</a:t>
-            </a:r>
-            <a:endParaRPr lang="en-US" sz="4000" dirty="0"/>
-          </a:p>
-          <a:p>
-            <a:pPr algn="l" marL="342900" indent="-342900">
-              <a:spcAft>
-                <a:spcPts val="800"/>
-              </a:spcAft>
-              <a:buSzPct val="100000"/>
-              <a:buFont typeface="+mj-lt"/>
-              <a:buAutoNum type="arabicPeriod" startAt="1"/>
-            </a:pPr>
-            <a:r>
-              <a:rPr lang="en-US" sz="4000" dirty="0">
-                <a:solidFill>
-                  <a:srgbClr val="111111"/>
-                </a:solidFill>
-                <a:latin typeface="Times New Roman" pitchFamily="34" charset="0"/>
-                <a:ea typeface="Times New Roman" pitchFamily="34" charset="-122"/>
-                <a:cs typeface="Times New Roman" pitchFamily="34" charset="-120"/>
-              </a:rPr>
-              <a:t>Natural growth rate is given in ______.</a:t>
-            </a:r>
-            <a:endParaRPr lang="en-US" sz="4000" dirty="0"/>
-          </a:p>
-          <a:p>
-            <a:pPr algn="l" marL="342900" indent="-342900">
-              <a:spcAft>
-                <a:spcPts val="800"/>
-              </a:spcAft>
-              <a:buSzPct val="100000"/>
-              <a:buFont typeface="+mj-lt"/>
-              <a:buAutoNum type="arabicPeriod" startAt="1"/>
-            </a:pPr>
-            <a:r>
-              <a:rPr lang="en-US" sz="4000" dirty="0">
-                <a:solidFill>
-                  <a:srgbClr val="111111"/>
-                </a:solidFill>
-                <a:latin typeface="Times New Roman" pitchFamily="34" charset="0"/>
-                <a:ea typeface="Times New Roman" pitchFamily="34" charset="-122"/>
-                <a:cs typeface="Times New Roman" pitchFamily="34" charset="-120"/>
-              </a:rPr>
-              <a:t>Birth rate minus death rate gives the natural ______ rate.</a:t>
+              <a:t>(38 − 10) ÷ 10 = 2.8 %.</a:t>
             </a:r>
             <a:endParaRPr lang="en-US" sz="4000" dirty="0"/>
           </a:p>
@@ -16474,7 +16671,7 @@
                 <a:ea typeface="Calibri" pitchFamily="34" charset="-122"/>
                 <a:cs typeface="Calibri" pitchFamily="34" charset="-120"/>
               </a:rPr>
-              <a:t>HOMEWORK</a:t>
+              <a:t>REMEDIATION</a:t>
             </a:r>
             <a:endParaRPr lang="en-US" sz="1400" dirty="0"/>
           </a:p>
@@ -16497,7 +16694,7 @@
         <p:spPr>
           <a:xfrm>
             <a:off x="0" y="658368"/>
-            <a:ext cx="5120640" cy="5833872"/>
+            <a:ext cx="1463040" cy="5833872"/>
           </a:xfrm>
           <a:prstGeom prst="rect">
             <a:avLst/>
@@ -16512,8 +16709,8 @@
         </p:nvSpPr>
         <p:spPr>
           <a:xfrm>
-            <a:off x="5349240" y="1005840"/>
-            <a:ext cx="6522415" cy="731520"/>
+            <a:off x="1691640" y="1005840"/>
+            <a:ext cx="10180015" cy="731520"/>
           </a:xfrm>
           <a:prstGeom prst="rect">
             <a:avLst/>
@@ -16539,7 +16736,7 @@
                 <a:ea typeface="Times New Roman" pitchFamily="34" charset="-122"/>
                 <a:cs typeface="Times New Roman" pitchFamily="34" charset="-120"/>
               </a:rPr>
-              <a:t>Homework</a:t>
+              <a:t>Remediation</a:t>
             </a:r>
             <a:endParaRPr lang="en-US" sz="3600" dirty="0"/>
           </a:p>
@@ -16553,8 +16750,8 @@
         </p:nvSpPr>
         <p:spPr>
           <a:xfrm>
-            <a:off x="5349240" y="1783080"/>
-            <a:ext cx="6522415" cy="4663440"/>
+            <a:off x="1691640" y="1783080"/>
+            <a:ext cx="10180015" cy="4663440"/>
           </a:xfrm>
           <a:prstGeom prst="rect">
             <a:avLst/>
@@ -16573,7 +16770,7 @@
               <a:buNone/>
             </a:pPr>
             <a:r>
-              <a:rPr lang="en-US" sz="4000" dirty="0">
+              <a:rPr lang="en-US" sz="4000" b="1" dirty="0">
                 <a:solidFill>
                   <a:srgbClr val="111111"/>
                 </a:solidFill>
@@ -16581,7 +16778,73 @@
                 <a:ea typeface="Times New Roman" pitchFamily="34" charset="-122"/>
                 <a:cs typeface="Times New Roman" pitchFamily="34" charset="-120"/>
               </a:rPr>
-              <a:t>A village of 5,000 people has 200 births and 50 deaths. Calculate the three indices.</a:t>
+              <a:t>Fill in the blanks:</a:t>
+            </a:r>
+            <a:endParaRPr lang="en-US" sz="4000" dirty="0"/>
+          </a:p>
+          <a:p>
+            <a:pPr algn="l" marL="342900" indent="-342900">
+              <a:spcAft>
+                <a:spcPts val="800"/>
+              </a:spcAft>
+              <a:buSzPct val="100000"/>
+              <a:buFont typeface="+mj-lt"/>
+              <a:buAutoNum type="arabicPeriod" startAt="1"/>
+            </a:pPr>
+            <a:r>
+              <a:rPr lang="en-US" sz="4000" dirty="0">
+                <a:solidFill>
+                  <a:srgbClr val="111111"/>
+                </a:solidFill>
+                <a:latin typeface="Times New Roman" pitchFamily="34" charset="0"/>
+                <a:ea typeface="Times New Roman" pitchFamily="34" charset="-122"/>
+                <a:cs typeface="Times New Roman" pitchFamily="34" charset="-120"/>
+              </a:rPr>
+              <a:t>Birth and death rates are given per ______.</a:t>
+            </a:r>
+            <a:endParaRPr lang="en-US" sz="4000" dirty="0"/>
+          </a:p>
+          <a:p>
+            <a:pPr algn="l" marL="342900" indent="-342900">
+              <a:spcAft>
+                <a:spcPts val="800"/>
+              </a:spcAft>
+              <a:buSzPct val="100000"/>
+              <a:buFont typeface="+mj-lt"/>
+              <a:buAutoNum type="arabicPeriod" startAt="1"/>
+            </a:pPr>
+            <a:r>
+              <a:rPr lang="en-US" sz="4000" dirty="0">
+                <a:solidFill>
+                  <a:srgbClr val="111111"/>
+                </a:solidFill>
+                <a:latin typeface="Times New Roman" pitchFamily="34" charset="0"/>
+                <a:ea typeface="Times New Roman" pitchFamily="34" charset="-122"/>
+                <a:cs typeface="Times New Roman" pitchFamily="34" charset="-120"/>
+              </a:rPr>
+              <a:t>Natural growth rate is given in ______.</a:t>
+            </a:r>
+            <a:endParaRPr lang="en-US" sz="4000" dirty="0"/>
+          </a:p>
+          <a:p>
+            <a:pPr algn="l" marL="342900" indent="-342900">
+              <a:spcAft>
+                <a:spcPts val="800"/>
+              </a:spcAft>
+              <a:buSzPct val="100000"/>
+              <a:buFont typeface="+mj-lt"/>
+              <a:buAutoNum type="arabicPeriod" startAt="1"/>
+            </a:pPr>
+            <a:r>
+              <a:rPr lang="en-US" sz="4000" dirty="0">
+                <a:solidFill>
+                  <a:srgbClr val="111111"/>
+                </a:solidFill>
+                <a:latin typeface="Times New Roman" pitchFamily="34" charset="0"/>
+                <a:ea typeface="Times New Roman" pitchFamily="34" charset="-122"/>
+                <a:cs typeface="Times New Roman" pitchFamily="34" charset="-120"/>
+              </a:rPr>
+              <a:t>Birth rate minus death rate gives the natural ______ rate.</a:t>
             </a:r>
             <a:endParaRPr lang="en-US" sz="4000" dirty="0"/>
           </a:p>
@@ -16693,7 +16956,7 @@
                 <a:ea typeface="Calibri" pitchFamily="34" charset="-122"/>
                 <a:cs typeface="Calibri" pitchFamily="34" charset="-120"/>
               </a:rPr>
-              <a:t>NEXT LESSON</a:t>
+              <a:t>HOMEWORK</a:t>
             </a:r>
             <a:endParaRPr lang="en-US" sz="1400" dirty="0"/>
           </a:p>
@@ -16758,7 +17021,7 @@
                 <a:ea typeface="Times New Roman" pitchFamily="34" charset="-122"/>
                 <a:cs typeface="Times New Roman" pitchFamily="34" charset="-120"/>
               </a:rPr>
-              <a:t>Next Lesson</a:t>
+              <a:t>Homework</a:t>
             </a:r>
             <a:endParaRPr lang="en-US" sz="3600" dirty="0"/>
           </a:p>
@@ -16782,17 +17045,17 @@
           <a:ln/>
         </p:spPr>
         <p:txBody>
-          <a:bodyPr wrap="square" lIns="0" tIns="0" rIns="0" bIns="0" rtlCol="0" anchor="ctr"/>
-          <a:lstStyle/>
-          <a:p>
-            <a:pPr algn="ctr" indent="0" marL="0">
+          <a:bodyPr wrap="square" lIns="0" tIns="0" rIns="0" bIns="0" rtlCol="0" anchor="t"/>
+          <a:lstStyle/>
+          <a:p>
+            <a:pPr algn="l" indent="0" marL="0">
               <a:spcAft>
                 <a:spcPts val="800"/>
               </a:spcAft>
               <a:buNone/>
             </a:pPr>
             <a:r>
-              <a:rPr lang="en-US" sz="4000" b="1" dirty="0">
+              <a:rPr lang="en-US" sz="4000" dirty="0">
                 <a:solidFill>
                   <a:srgbClr val="111111"/>
                 </a:solidFill>
@@ -16800,27 +17063,7 @@
                 <a:ea typeface="Times New Roman" pitchFamily="34" charset="-122"/>
                 <a:cs typeface="Times New Roman" pitchFamily="34" charset="-120"/>
               </a:rPr>
-              <a:t>Our next lesson will be on:</a:t>
-            </a:r>
-            <a:endParaRPr lang="en-US" sz="4000" dirty="0"/>
-          </a:p>
-          <a:p>
-            <a:pPr algn="ctr" indent="0" marL="0">
-              <a:spcAft>
-                <a:spcPts val="800"/>
-              </a:spcAft>
-              <a:buNone/>
-            </a:pPr>
-            <a:r>
-              <a:rPr lang="en-US" sz="4000" b="1" dirty="0">
-                <a:solidFill>
-                  <a:srgbClr val="990011"/>
-                </a:solidFill>
-                <a:latin typeface="Times New Roman" pitchFamily="34" charset="0"/>
-                <a:ea typeface="Times New Roman" pitchFamily="34" charset="-122"/>
-                <a:cs typeface="Times New Roman" pitchFamily="34" charset="-120"/>
-              </a:rPr>
-              <a:t>Lesson 2: The Uneven Distribution of the World's Population</a:t>
+              <a:t>A village of 5,000 people has 200 births and 50 deaths. Calculate the three indices.</a:t>
             </a:r>
             <a:endParaRPr lang="en-US" sz="4000" dirty="0"/>
           </a:p>
@@ -16932,6 +17175,245 @@
                 <a:ea typeface="Calibri" pitchFamily="34" charset="-122"/>
                 <a:cs typeface="Calibri" pitchFamily="34" charset="-120"/>
               </a:rPr>
+              <a:t>NEXT LESSON</a:t>
+            </a:r>
+            <a:endParaRPr lang="en-US" sz="1400" dirty="0"/>
+          </a:p>
+        </p:txBody>
+      </p:sp>
+      <p:pic>
+        <p:nvPicPr>
+          <p:cNvPr id="3" name="Image 0" descr="/home/claude/f4/img/minesec_sheet.png">    </p:cNvPr>
+          <p:cNvPicPr>
+            <a:picLocks noChangeAspect="1"/>
+          </p:cNvPicPr>
+          <p:nvPr/>
+        </p:nvPicPr>
+        <p:blipFill>
+          <a:blip r:embed="rId1"/>
+          <a:stretch>
+            <a:fillRect/>
+          </a:stretch>
+        </p:blipFill>
+        <p:spPr>
+          <a:xfrm>
+            <a:off x="0" y="658368"/>
+            <a:ext cx="5120640" cy="5833872"/>
+          </a:xfrm>
+          <a:prstGeom prst="rect">
+            <a:avLst/>
+          </a:prstGeom>
+        </p:spPr>
+      </p:pic>
+      <p:sp>
+        <p:nvSpPr>
+          <p:cNvPr id="4" name="Text 1"/>
+          <p:cNvSpPr/>
+          <p:nvPr/>
+        </p:nvSpPr>
+        <p:spPr>
+          <a:xfrm>
+            <a:off x="5349240" y="1005840"/>
+            <a:ext cx="6522415" cy="731520"/>
+          </a:xfrm>
+          <a:prstGeom prst="rect">
+            <a:avLst/>
+          </a:prstGeom>
+          <a:noFill/>
+          <a:ln/>
+        </p:spPr>
+        <p:txBody>
+          <a:bodyPr wrap="square" lIns="0" tIns="0" rIns="0" bIns="0" rtlCol="0" anchor="ctr">
+            <a:normAutofit/>
+          </a:bodyPr>
+          <a:lstStyle/>
+          <a:p>
+            <a:pPr algn="ctr" indent="0" marL="0">
+              <a:buNone/>
+            </a:pPr>
+            <a:r>
+              <a:rPr lang="en-US" sz="3600" b="1" dirty="0">
+                <a:solidFill>
+                  <a:srgbClr val="990011"/>
+                </a:solidFill>
+                <a:latin typeface="Times New Roman" pitchFamily="34" charset="0"/>
+                <a:ea typeface="Times New Roman" pitchFamily="34" charset="-122"/>
+                <a:cs typeface="Times New Roman" pitchFamily="34" charset="-120"/>
+              </a:rPr>
+              <a:t>Next Lesson</a:t>
+            </a:r>
+            <a:endParaRPr lang="en-US" sz="3600" dirty="0"/>
+          </a:p>
+        </p:txBody>
+      </p:sp>
+      <p:sp>
+        <p:nvSpPr>
+          <p:cNvPr id="5" name="Text 2"/>
+          <p:cNvSpPr/>
+          <p:nvPr/>
+        </p:nvSpPr>
+        <p:spPr>
+          <a:xfrm>
+            <a:off x="5349240" y="1783080"/>
+            <a:ext cx="6522415" cy="4663440"/>
+          </a:xfrm>
+          <a:prstGeom prst="rect">
+            <a:avLst/>
+          </a:prstGeom>
+          <a:noFill/>
+          <a:ln/>
+        </p:spPr>
+        <p:txBody>
+          <a:bodyPr wrap="square" lIns="0" tIns="0" rIns="0" bIns="0" rtlCol="0" anchor="ctr"/>
+          <a:lstStyle/>
+          <a:p>
+            <a:pPr algn="ctr" indent="0" marL="0">
+              <a:spcAft>
+                <a:spcPts val="800"/>
+              </a:spcAft>
+              <a:buNone/>
+            </a:pPr>
+            <a:r>
+              <a:rPr lang="en-US" sz="4000" b="1" dirty="0">
+                <a:solidFill>
+                  <a:srgbClr val="111111"/>
+                </a:solidFill>
+                <a:latin typeface="Times New Roman" pitchFamily="34" charset="0"/>
+                <a:ea typeface="Times New Roman" pitchFamily="34" charset="-122"/>
+                <a:cs typeface="Times New Roman" pitchFamily="34" charset="-120"/>
+              </a:rPr>
+              <a:t>Our next lesson will be on:</a:t>
+            </a:r>
+            <a:endParaRPr lang="en-US" sz="4000" dirty="0"/>
+          </a:p>
+          <a:p>
+            <a:pPr algn="ctr" indent="0" marL="0">
+              <a:spcAft>
+                <a:spcPts val="800"/>
+              </a:spcAft>
+              <a:buNone/>
+            </a:pPr>
+            <a:r>
+              <a:rPr lang="en-US" sz="4000" b="1" dirty="0">
+                <a:solidFill>
+                  <a:srgbClr val="990011"/>
+                </a:solidFill>
+                <a:latin typeface="Times New Roman" pitchFamily="34" charset="0"/>
+                <a:ea typeface="Times New Roman" pitchFamily="34" charset="-122"/>
+                <a:cs typeface="Times New Roman" pitchFamily="34" charset="-120"/>
+              </a:rPr>
+              <a:t>Lesson 2: The Uneven Distribution of the World's Population</a:t>
+            </a:r>
+            <a:endParaRPr lang="en-US" sz="4000" dirty="0"/>
+          </a:p>
+        </p:txBody>
+      </p:sp>
+      <p:sp>
+        <p:nvSpPr>
+          <p:cNvPr id="25" name="Slide Number Placeholder 0"/>
+          <p:cNvSpPr>
+            <a:spLocks noGrp="1"/>
+          </p:cNvSpPr>
+          <p:nvPr>
+            <p:ph type="sldNum" sz="quarter" idx="4294967295"/>
+          </p:nvPr>
+        </p:nvSpPr>
+        <p:spPr>
+          <a:xfrm>
+            <a:off x="27432" y="91440"/>
+            <a:ext cx="585216" cy="475488"/>
+          </a:xfrm>
+          <a:prstGeom prst="rect">
+            <a:avLst/>
+          </a:prstGeom>
+          <a:extLst>
+            <a:ext uri="{C572A759-6A51-4108-AA02-DFA0A04FC94B}">
+              <ma14:wrappingTextBoxFlag xmlns:ma14="http://schemas.microsoft.com/office/mac/drawingml/2011/main" val="0"/>
+            </a:ext>
+          </a:extLst>
+        </p:spPr>
+        <p:txBody>
+          <a:bodyPr/>
+          <a:lstStyle>
+            <a:lvl1pPr>
+              <a:defRPr sz="2000">
+                <a:solidFill>
+                  <a:srgbClr val="FFFFFF"/>
+                </a:solidFill>
+                <a:latin typeface="Calibri"/>
+                <a:ea typeface="Calibri"/>
+                <a:cs typeface="Calibri"/>
+              </a:defRPr>
+            </a:lvl1pPr>
+          </a:lstStyle>
+          <a:p>
+            <a:pPr algn="ctr"/>
+            <a:fld id="{F7021451-1387-4CA6-816F-3879F97B5CBC}" type="slidenum">
+              <a:rPr b="1" lang="en-US"/>
+              <a:t>48</a:t>
+            </a:fld>
+            <a:endParaRPr lang="en-US"/>
+          </a:p>
+        </p:txBody>
+      </p:sp>
+    </p:spTree>
+  </p:cSld>
+  <p:clrMapOvr>
+    <a:masterClrMapping/>
+  </p:clrMapOvr>
+</p:sld>
+</file>
+
+<file path=ppt/slides/slide49.xml><?xml version="1.0" encoding="utf-8"?>
+<p:sld xmlns:a="http://schemas.openxmlformats.org/drawingml/2006/main" xmlns:r="http://schemas.openxmlformats.org/officeDocument/2006/relationships" xmlns:p="http://schemas.openxmlformats.org/presentationml/2006/main">
+  <p:cSld name="Slide 49">
+    <p:spTree>
+      <p:nvGrpSpPr>
+        <p:cNvPr id="1" name=""/>
+        <p:cNvGrpSpPr/>
+        <p:nvPr/>
+      </p:nvGrpSpPr>
+      <p:grpSpPr>
+        <a:xfrm>
+          <a:off x="0" y="0"/>
+          <a:ext cx="0" cy="0"/>
+          <a:chOff x="0" y="0"/>
+          <a:chExt cx="0" cy="0"/>
+        </a:xfrm>
+      </p:grpSpPr>
+      <p:sp>
+        <p:nvSpPr>
+          <p:cNvPr id="2" name="Text 0"/>
+          <p:cNvSpPr/>
+          <p:nvPr/>
+        </p:nvSpPr>
+        <p:spPr>
+          <a:xfrm>
+            <a:off x="457200" y="713232"/>
+            <a:ext cx="11368735" cy="274320"/>
+          </a:xfrm>
+          <a:prstGeom prst="rect">
+            <a:avLst/>
+          </a:prstGeom>
+          <a:noFill/>
+          <a:ln/>
+        </p:spPr>
+        <p:txBody>
+          <a:bodyPr wrap="square" lIns="0" tIns="0" rIns="0" bIns="0" rtlCol="0" anchor="ctr"/>
+          <a:lstStyle/>
+          <a:p>
+            <a:pPr algn="r" indent="0" marL="0">
+              <a:buNone/>
+            </a:pPr>
+            <a:r>
+              <a:rPr lang="en-US" sz="1400" b="1" dirty="0">
+                <a:solidFill>
+                  <a:srgbClr val="1C3F6E"/>
+                </a:solidFill>
+                <a:latin typeface="Calibri" pitchFamily="34" charset="0"/>
+                <a:ea typeface="Calibri" pitchFamily="34" charset="-122"/>
+                <a:cs typeface="Calibri" pitchFamily="34" charset="-120"/>
+              </a:rPr>
               <a:t>BILINGUAL GAME</a:t>
             </a:r>
             <a:endParaRPr lang="en-US" sz="1400" dirty="0"/>
@@ -16979,7 +17461,7 @@
       </p:sp>
       <p:graphicFrame>
         <p:nvGraphicFramePr>
-          <p:cNvPr id="49" name="Table 0"/>
+          <p:cNvPr id="50" name="Table 0"/>
           <p:cNvGraphicFramePr>
             <a:graphicFrameLocks noGrp="1"/>
           </p:cNvGraphicFramePr>
@@ -18015,7 +18497,7 @@
             <a:pPr algn="ctr"/>
             <a:fld id="{F7021451-1387-4CA6-816F-3879F97B5CBC}" type="slidenum">
               <a:rPr b="1" lang="en-US"/>
-              <a:t>48</a:t>
+              <a:t>49</a:t>
             </a:fld>
             <a:endParaRPr lang="en-US"/>
           </a:p>
@@ -18029,9 +18511,9 @@
 </p:sld>
 </file>
 
-<file path=ppt/slides/slide49.xml><?xml version="1.0" encoding="utf-8"?>
+<file path=ppt/slides/slide5.xml><?xml version="1.0" encoding="utf-8"?>
 <p:sld xmlns:a="http://schemas.openxmlformats.org/drawingml/2006/main" xmlns:r="http://schemas.openxmlformats.org/officeDocument/2006/relationships" xmlns:p="http://schemas.openxmlformats.org/presentationml/2006/main">
-  <p:cSld name="Slide 49">
+  <p:cSld name="Slide 5">
     <p:spTree>
       <p:nvGrpSpPr>
         <p:cNvPr id="1" name=""/>
@@ -18079,6 +18561,225 @@
                 <a:ea typeface="Calibri" pitchFamily="34" charset="-122"/>
                 <a:cs typeface="Calibri" pitchFamily="34" charset="-120"/>
               </a:rPr>
+              <a:t>HOMEWORK CORRECTION</a:t>
+            </a:r>
+            <a:endParaRPr lang="en-US" sz="1400" dirty="0"/>
+          </a:p>
+        </p:txBody>
+      </p:sp>
+      <p:pic>
+        <p:nvPicPr>
+          <p:cNvPr id="3" name="Image 0" descr="/home/claude/f4/img/minesec_sheet.png">    </p:cNvPr>
+          <p:cNvPicPr>
+            <a:picLocks noChangeAspect="1"/>
+          </p:cNvPicPr>
+          <p:nvPr/>
+        </p:nvPicPr>
+        <p:blipFill>
+          <a:blip r:embed="rId1"/>
+          <a:stretch>
+            <a:fillRect/>
+          </a:stretch>
+        </p:blipFill>
+        <p:spPr>
+          <a:xfrm>
+            <a:off x="0" y="658368"/>
+            <a:ext cx="5120640" cy="5833872"/>
+          </a:xfrm>
+          <a:prstGeom prst="rect">
+            <a:avLst/>
+          </a:prstGeom>
+        </p:spPr>
+      </p:pic>
+      <p:sp>
+        <p:nvSpPr>
+          <p:cNvPr id="4" name="Text 1"/>
+          <p:cNvSpPr/>
+          <p:nvPr/>
+        </p:nvSpPr>
+        <p:spPr>
+          <a:xfrm>
+            <a:off x="5349240" y="1005840"/>
+            <a:ext cx="6522415" cy="731520"/>
+          </a:xfrm>
+          <a:prstGeom prst="rect">
+            <a:avLst/>
+          </a:prstGeom>
+          <a:noFill/>
+          <a:ln/>
+        </p:spPr>
+        <p:txBody>
+          <a:bodyPr wrap="square" lIns="0" tIns="0" rIns="0" bIns="0" rtlCol="0" anchor="ctr">
+            <a:normAutofit/>
+          </a:bodyPr>
+          <a:lstStyle/>
+          <a:p>
+            <a:pPr algn="ctr" indent="0" marL="0">
+              <a:buNone/>
+            </a:pPr>
+            <a:r>
+              <a:rPr lang="en-US" sz="3600" b="1" dirty="0">
+                <a:solidFill>
+                  <a:srgbClr val="990011"/>
+                </a:solidFill>
+                <a:latin typeface="Times New Roman" pitchFamily="34" charset="0"/>
+                <a:ea typeface="Times New Roman" pitchFamily="34" charset="-122"/>
+                <a:cs typeface="Times New Roman" pitchFamily="34" charset="-120"/>
+              </a:rPr>
+              <a:t>Correction: Possible Answer</a:t>
+            </a:r>
+            <a:endParaRPr lang="en-US" sz="3600" dirty="0"/>
+          </a:p>
+        </p:txBody>
+      </p:sp>
+      <p:sp>
+        <p:nvSpPr>
+          <p:cNvPr id="5" name="Text 2"/>
+          <p:cNvSpPr/>
+          <p:nvPr/>
+        </p:nvSpPr>
+        <p:spPr>
+          <a:xfrm>
+            <a:off x="5349240" y="1783080"/>
+            <a:ext cx="6522415" cy="4663440"/>
+          </a:xfrm>
+          <a:prstGeom prst="rect">
+            <a:avLst/>
+          </a:prstGeom>
+          <a:noFill/>
+          <a:ln/>
+        </p:spPr>
+        <p:txBody>
+          <a:bodyPr wrap="square" lIns="0" tIns="0" rIns="0" bIns="0" rtlCol="0" anchor="t"/>
+          <a:lstStyle/>
+          <a:p>
+            <a:pPr algn="l" indent="0" marL="0">
+              <a:spcAft>
+                <a:spcPts val="800"/>
+              </a:spcAft>
+              <a:buNone/>
+            </a:pPr>
+            <a:r>
+              <a:rPr lang="en-US" sz="4000" dirty="0">
+                <a:solidFill>
+                  <a:srgbClr val="111111"/>
+                </a:solidFill>
+                <a:latin typeface="Times New Roman" pitchFamily="34" charset="0"/>
+                <a:ea typeface="Times New Roman" pitchFamily="34" charset="-122"/>
+                <a:cs typeface="Times New Roman" pitchFamily="34" charset="-120"/>
+              </a:rPr>
+              <a:t>Answers vary. Often parents had many brothers and sisters (6 to 10); many families today have fewer children, but more of them survive.</a:t>
+            </a:r>
+            <a:endParaRPr lang="en-US" sz="4000" dirty="0"/>
+          </a:p>
+        </p:txBody>
+      </p:sp>
+      <p:sp>
+        <p:nvSpPr>
+          <p:cNvPr id="25" name="Slide Number Placeholder 0"/>
+          <p:cNvSpPr>
+            <a:spLocks noGrp="1"/>
+          </p:cNvSpPr>
+          <p:nvPr>
+            <p:ph type="sldNum" sz="quarter" idx="4294967295"/>
+          </p:nvPr>
+        </p:nvSpPr>
+        <p:spPr>
+          <a:xfrm>
+            <a:off x="27432" y="91440"/>
+            <a:ext cx="585216" cy="475488"/>
+          </a:xfrm>
+          <a:prstGeom prst="rect">
+            <a:avLst/>
+          </a:prstGeom>
+          <a:extLst>
+            <a:ext uri="{C572A759-6A51-4108-AA02-DFA0A04FC94B}">
+              <ma14:wrappingTextBoxFlag xmlns:ma14="http://schemas.microsoft.com/office/mac/drawingml/2011/main" val="0"/>
+            </a:ext>
+          </a:extLst>
+        </p:spPr>
+        <p:txBody>
+          <a:bodyPr/>
+          <a:lstStyle>
+            <a:lvl1pPr>
+              <a:defRPr sz="2000">
+                <a:solidFill>
+                  <a:srgbClr val="FFFFFF"/>
+                </a:solidFill>
+                <a:latin typeface="Calibri"/>
+                <a:ea typeface="Calibri"/>
+                <a:cs typeface="Calibri"/>
+              </a:defRPr>
+            </a:lvl1pPr>
+          </a:lstStyle>
+          <a:p>
+            <a:pPr algn="ctr"/>
+            <a:fld id="{F7021451-1387-4CA6-816F-3879F97B5CBC}" type="slidenum">
+              <a:rPr b="1" lang="en-US"/>
+              <a:t>5</a:t>
+            </a:fld>
+            <a:endParaRPr lang="en-US"/>
+          </a:p>
+        </p:txBody>
+      </p:sp>
+    </p:spTree>
+  </p:cSld>
+  <p:clrMapOvr>
+    <a:masterClrMapping/>
+  </p:clrMapOvr>
+</p:sld>
+</file>
+
+<file path=ppt/slides/slide50.xml><?xml version="1.0" encoding="utf-8"?>
+<p:sld xmlns:a="http://schemas.openxmlformats.org/drawingml/2006/main" xmlns:r="http://schemas.openxmlformats.org/officeDocument/2006/relationships" xmlns:p="http://schemas.openxmlformats.org/presentationml/2006/main">
+  <p:cSld name="Slide 50">
+    <p:spTree>
+      <p:nvGrpSpPr>
+        <p:cNvPr id="1" name=""/>
+        <p:cNvGrpSpPr/>
+        <p:nvPr/>
+      </p:nvGrpSpPr>
+      <p:grpSpPr>
+        <a:xfrm>
+          <a:off x="0" y="0"/>
+          <a:ext cx="0" cy="0"/>
+          <a:chOff x="0" y="0"/>
+          <a:chExt cx="0" cy="0"/>
+        </a:xfrm>
+      </p:grpSpPr>
+      <p:sp>
+        <p:nvSpPr>
+          <p:cNvPr id="2" name="Text 0"/>
+          <p:cNvSpPr/>
+          <p:nvPr/>
+        </p:nvSpPr>
+        <p:spPr>
+          <a:xfrm>
+            <a:off x="457200" y="713232"/>
+            <a:ext cx="11368735" cy="274320"/>
+          </a:xfrm>
+          <a:prstGeom prst="rect">
+            <a:avLst/>
+          </a:prstGeom>
+          <a:noFill/>
+          <a:ln/>
+        </p:spPr>
+        <p:txBody>
+          <a:bodyPr wrap="square" lIns="0" tIns="0" rIns="0" bIns="0" rtlCol="0" anchor="ctr"/>
+          <a:lstStyle/>
+          <a:p>
+            <a:pPr algn="r" indent="0" marL="0">
+              <a:buNone/>
+            </a:pPr>
+            <a:r>
+              <a:rPr lang="en-US" sz="1400" b="1" dirty="0">
+                <a:solidFill>
+                  <a:srgbClr val="1C3F6E"/>
+                </a:solidFill>
+                <a:latin typeface="Calibri" pitchFamily="34" charset="0"/>
+                <a:ea typeface="Calibri" pitchFamily="34" charset="-122"/>
+                <a:cs typeface="Calibri" pitchFamily="34" charset="-120"/>
+              </a:rPr>
               <a:t>LOGBOOK</a:t>
             </a:r>
             <a:endParaRPr lang="en-US" sz="1400" dirty="0"/>
@@ -18126,7 +18827,7 @@
       </p:sp>
       <p:graphicFrame>
         <p:nvGraphicFramePr>
-          <p:cNvPr id="50" name="Table 0"/>
+          <p:cNvPr id="51" name="Table 0"/>
           <p:cNvGraphicFramePr>
             <a:graphicFrameLocks noGrp="1"/>
           </p:cNvGraphicFramePr>
@@ -18748,7 +19449,7 @@
             <a:pPr algn="ctr"/>
             <a:fld id="{F7021451-1387-4CA6-816F-3879F97B5CBC}" type="slidenum">
               <a:rPr b="1" lang="en-US"/>
-              <a:t>49</a:t>
+              <a:t>50</a:t>
             </a:fld>
             <a:endParaRPr lang="en-US"/>
           </a:p>
@@ -18762,9 +19463,9 @@
 </p:sld>
 </file>
 
-<file path=ppt/slides/slide5.xml><?xml version="1.0" encoding="utf-8"?>
+<file path=ppt/slides/slide51.xml><?xml version="1.0" encoding="utf-8"?>
 <p:sld xmlns:a="http://schemas.openxmlformats.org/drawingml/2006/main" xmlns:r="http://schemas.openxmlformats.org/officeDocument/2006/relationships" xmlns:p="http://schemas.openxmlformats.org/presentationml/2006/main">
-  <p:cSld name="Slide 5">
+  <p:cSld name="Slide 51">
     <p:spTree>
       <p:nvGrpSpPr>
         <p:cNvPr id="1" name=""/>
@@ -18812,225 +19513,6 @@
                 <a:ea typeface="Calibri" pitchFamily="34" charset="-122"/>
                 <a:cs typeface="Calibri" pitchFamily="34" charset="-120"/>
               </a:rPr>
-              <a:t>HOMEWORK CORRECTION</a:t>
-            </a:r>
-            <a:endParaRPr lang="en-US" sz="1400" dirty="0"/>
-          </a:p>
-        </p:txBody>
-      </p:sp>
-      <p:pic>
-        <p:nvPicPr>
-          <p:cNvPr id="3" name="Image 0" descr="/home/claude/f4/img/minesec_sheet.png">    </p:cNvPr>
-          <p:cNvPicPr>
-            <a:picLocks noChangeAspect="1"/>
-          </p:cNvPicPr>
-          <p:nvPr/>
-        </p:nvPicPr>
-        <p:blipFill>
-          <a:blip r:embed="rId1"/>
-          <a:stretch>
-            <a:fillRect/>
-          </a:stretch>
-        </p:blipFill>
-        <p:spPr>
-          <a:xfrm>
-            <a:off x="0" y="658368"/>
-            <a:ext cx="5120640" cy="5833872"/>
-          </a:xfrm>
-          <a:prstGeom prst="rect">
-            <a:avLst/>
-          </a:prstGeom>
-        </p:spPr>
-      </p:pic>
-      <p:sp>
-        <p:nvSpPr>
-          <p:cNvPr id="4" name="Text 1"/>
-          <p:cNvSpPr/>
-          <p:nvPr/>
-        </p:nvSpPr>
-        <p:spPr>
-          <a:xfrm>
-            <a:off x="5349240" y="1005840"/>
-            <a:ext cx="6522415" cy="731520"/>
-          </a:xfrm>
-          <a:prstGeom prst="rect">
-            <a:avLst/>
-          </a:prstGeom>
-          <a:noFill/>
-          <a:ln/>
-        </p:spPr>
-        <p:txBody>
-          <a:bodyPr wrap="square" lIns="0" tIns="0" rIns="0" bIns="0" rtlCol="0" anchor="ctr">
-            <a:normAutofit/>
-          </a:bodyPr>
-          <a:lstStyle/>
-          <a:p>
-            <a:pPr algn="ctr" indent="0" marL="0">
-              <a:buNone/>
-            </a:pPr>
-            <a:r>
-              <a:rPr lang="en-US" sz="3600" b="1" dirty="0">
-                <a:solidFill>
-                  <a:srgbClr val="990011"/>
-                </a:solidFill>
-                <a:latin typeface="Times New Roman" pitchFamily="34" charset="0"/>
-                <a:ea typeface="Times New Roman" pitchFamily="34" charset="-122"/>
-                <a:cs typeface="Times New Roman" pitchFamily="34" charset="-120"/>
-              </a:rPr>
-              <a:t>Correction: Possible Answer</a:t>
-            </a:r>
-            <a:endParaRPr lang="en-US" sz="3600" dirty="0"/>
-          </a:p>
-        </p:txBody>
-      </p:sp>
-      <p:sp>
-        <p:nvSpPr>
-          <p:cNvPr id="5" name="Text 2"/>
-          <p:cNvSpPr/>
-          <p:nvPr/>
-        </p:nvSpPr>
-        <p:spPr>
-          <a:xfrm>
-            <a:off x="5349240" y="1783080"/>
-            <a:ext cx="6522415" cy="4663440"/>
-          </a:xfrm>
-          <a:prstGeom prst="rect">
-            <a:avLst/>
-          </a:prstGeom>
-          <a:noFill/>
-          <a:ln/>
-        </p:spPr>
-        <p:txBody>
-          <a:bodyPr wrap="square" lIns="0" tIns="0" rIns="0" bIns="0" rtlCol="0" anchor="t"/>
-          <a:lstStyle/>
-          <a:p>
-            <a:pPr algn="l" indent="0" marL="0">
-              <a:spcAft>
-                <a:spcPts val="800"/>
-              </a:spcAft>
-              <a:buNone/>
-            </a:pPr>
-            <a:r>
-              <a:rPr lang="en-US" sz="4000" dirty="0">
-                <a:solidFill>
-                  <a:srgbClr val="111111"/>
-                </a:solidFill>
-                <a:latin typeface="Times New Roman" pitchFamily="34" charset="0"/>
-                <a:ea typeface="Times New Roman" pitchFamily="34" charset="-122"/>
-                <a:cs typeface="Times New Roman" pitchFamily="34" charset="-120"/>
-              </a:rPr>
-              <a:t>Answers vary. Often parents had many brothers and sisters (6 to 10); many families today have fewer children, but more of them survive.</a:t>
-            </a:r>
-            <a:endParaRPr lang="en-US" sz="4000" dirty="0"/>
-          </a:p>
-        </p:txBody>
-      </p:sp>
-      <p:sp>
-        <p:nvSpPr>
-          <p:cNvPr id="25" name="Slide Number Placeholder 0"/>
-          <p:cNvSpPr>
-            <a:spLocks noGrp="1"/>
-          </p:cNvSpPr>
-          <p:nvPr>
-            <p:ph type="sldNum" sz="quarter" idx="4294967295"/>
-          </p:nvPr>
-        </p:nvSpPr>
-        <p:spPr>
-          <a:xfrm>
-            <a:off x="27432" y="91440"/>
-            <a:ext cx="585216" cy="475488"/>
-          </a:xfrm>
-          <a:prstGeom prst="rect">
-            <a:avLst/>
-          </a:prstGeom>
-          <a:extLst>
-            <a:ext uri="{C572A759-6A51-4108-AA02-DFA0A04FC94B}">
-              <ma14:wrappingTextBoxFlag xmlns:ma14="http://schemas.microsoft.com/office/mac/drawingml/2011/main" val="0"/>
-            </a:ext>
-          </a:extLst>
-        </p:spPr>
-        <p:txBody>
-          <a:bodyPr/>
-          <a:lstStyle>
-            <a:lvl1pPr>
-              <a:defRPr sz="2000">
-                <a:solidFill>
-                  <a:srgbClr val="FFFFFF"/>
-                </a:solidFill>
-                <a:latin typeface="Calibri"/>
-                <a:ea typeface="Calibri"/>
-                <a:cs typeface="Calibri"/>
-              </a:defRPr>
-            </a:lvl1pPr>
-          </a:lstStyle>
-          <a:p>
-            <a:pPr algn="ctr"/>
-            <a:fld id="{F7021451-1387-4CA6-816F-3879F97B5CBC}" type="slidenum">
-              <a:rPr b="1" lang="en-US"/>
-              <a:t>5</a:t>
-            </a:fld>
-            <a:endParaRPr lang="en-US"/>
-          </a:p>
-        </p:txBody>
-      </p:sp>
-    </p:spTree>
-  </p:cSld>
-  <p:clrMapOvr>
-    <a:masterClrMapping/>
-  </p:clrMapOvr>
-</p:sld>
-</file>
-
-<file path=ppt/slides/slide50.xml><?xml version="1.0" encoding="utf-8"?>
-<p:sld xmlns:a="http://schemas.openxmlformats.org/drawingml/2006/main" xmlns:r="http://schemas.openxmlformats.org/officeDocument/2006/relationships" xmlns:p="http://schemas.openxmlformats.org/presentationml/2006/main">
-  <p:cSld name="Slide 50">
-    <p:spTree>
-      <p:nvGrpSpPr>
-        <p:cNvPr id="1" name=""/>
-        <p:cNvGrpSpPr/>
-        <p:nvPr/>
-      </p:nvGrpSpPr>
-      <p:grpSpPr>
-        <a:xfrm>
-          <a:off x="0" y="0"/>
-          <a:ext cx="0" cy="0"/>
-          <a:chOff x="0" y="0"/>
-          <a:chExt cx="0" cy="0"/>
-        </a:xfrm>
-      </p:grpSpPr>
-      <p:sp>
-        <p:nvSpPr>
-          <p:cNvPr id="2" name="Text 0"/>
-          <p:cNvSpPr/>
-          <p:nvPr/>
-        </p:nvSpPr>
-        <p:spPr>
-          <a:xfrm>
-            <a:off x="457200" y="713232"/>
-            <a:ext cx="11368735" cy="274320"/>
-          </a:xfrm>
-          <a:prstGeom prst="rect">
-            <a:avLst/>
-          </a:prstGeom>
-          <a:noFill/>
-          <a:ln/>
-        </p:spPr>
-        <p:txBody>
-          <a:bodyPr wrap="square" lIns="0" tIns="0" rIns="0" bIns="0" rtlCol="0" anchor="ctr"/>
-          <a:lstStyle/>
-          <a:p>
-            <a:pPr algn="r" indent="0" marL="0">
-              <a:buNone/>
-            </a:pPr>
-            <a:r>
-              <a:rPr lang="en-US" sz="1400" b="1" dirty="0">
-                <a:solidFill>
-                  <a:srgbClr val="1C3F6E"/>
-                </a:solidFill>
-                <a:latin typeface="Calibri" pitchFamily="34" charset="0"/>
-                <a:ea typeface="Calibri" pitchFamily="34" charset="-122"/>
-                <a:cs typeface="Calibri" pitchFamily="34" charset="-120"/>
-              </a:rPr>
               <a:t>LOGBOOK</a:t>
             </a:r>
             <a:endParaRPr lang="en-US" sz="1400" dirty="0"/>
@@ -19078,7 +19560,7 @@
       </p:sp>
       <p:graphicFrame>
         <p:nvGraphicFramePr>
-          <p:cNvPr id="51" name="Table 0"/>
+          <p:cNvPr id="52" name="Table 0"/>
           <p:cNvGraphicFramePr>
             <a:graphicFrameLocks noGrp="1"/>
           </p:cNvGraphicFramePr>
@@ -19188,7 +19670,7 @@
                           <a:ea typeface="Calibri" pitchFamily="34" charset="-122"/>
                           <a:cs typeface="Calibri" pitchFamily="34" charset="-120"/>
                         </a:rPr>
-                        <a:t>DEFINITIONS; Formulas; Worked Example.</a:t>
+                        <a:t>DEFINITIONS; Formulas; Worked Example; The Case of Cameroon.</a:t>
                       </a:r>
                       <a:endParaRPr lang="en-US" sz="1600" dirty="0">
                         <a:latin typeface="Calibri" charset="0"/>
@@ -19838,331 +20320,6 @@
             <a:pPr algn="ctr"/>
             <a:fld id="{F7021451-1387-4CA6-816F-3879F97B5CBC}" type="slidenum">
               <a:rPr b="1" lang="en-US"/>
-              <a:t>50</a:t>
-            </a:fld>
-            <a:endParaRPr lang="en-US"/>
-          </a:p>
-        </p:txBody>
-      </p:sp>
-    </p:spTree>
-  </p:cSld>
-  <p:clrMapOvr>
-    <a:masterClrMapping/>
-  </p:clrMapOvr>
-</p:sld>
-</file>
-
-<file path=ppt/slides/slide51.xml><?xml version="1.0" encoding="utf-8"?>
-<p:sld xmlns:a="http://schemas.openxmlformats.org/drawingml/2006/main" xmlns:r="http://schemas.openxmlformats.org/officeDocument/2006/relationships" xmlns:p="http://schemas.openxmlformats.org/presentationml/2006/main">
-  <p:cSld name="Slide 51">
-    <p:spTree>
-      <p:nvGrpSpPr>
-        <p:cNvPr id="1" name=""/>
-        <p:cNvGrpSpPr/>
-        <p:nvPr/>
-      </p:nvGrpSpPr>
-      <p:grpSpPr>
-        <a:xfrm>
-          <a:off x="0" y="0"/>
-          <a:ext cx="0" cy="0"/>
-          <a:chOff x="0" y="0"/>
-          <a:chExt cx="0" cy="0"/>
-        </a:xfrm>
-      </p:grpSpPr>
-      <p:sp>
-        <p:nvSpPr>
-          <p:cNvPr id="2" name="Text 0"/>
-          <p:cNvSpPr/>
-          <p:nvPr/>
-        </p:nvSpPr>
-        <p:spPr>
-          <a:xfrm>
-            <a:off x="457200" y="713232"/>
-            <a:ext cx="11368735" cy="274320"/>
-          </a:xfrm>
-          <a:prstGeom prst="rect">
-            <a:avLst/>
-          </a:prstGeom>
-          <a:noFill/>
-          <a:ln/>
-        </p:spPr>
-        <p:txBody>
-          <a:bodyPr wrap="square" lIns="0" tIns="0" rIns="0" bIns="0" rtlCol="0" anchor="ctr"/>
-          <a:lstStyle/>
-          <a:p>
-            <a:pPr algn="r" indent="0" marL="0">
-              <a:buNone/>
-            </a:pPr>
-            <a:r>
-              <a:rPr lang="en-US" sz="1400" b="1" dirty="0">
-                <a:solidFill>
-                  <a:srgbClr val="1C3F6E"/>
-                </a:solidFill>
-                <a:latin typeface="Calibri" pitchFamily="34" charset="0"/>
-                <a:ea typeface="Calibri" pitchFamily="34" charset="-122"/>
-                <a:cs typeface="Calibri" pitchFamily="34" charset="-120"/>
-              </a:rPr>
-              <a:t>TEACHER'S NOTE</a:t>
-            </a:r>
-            <a:endParaRPr lang="en-US" sz="1400" dirty="0"/>
-          </a:p>
-        </p:txBody>
-      </p:sp>
-      <p:pic>
-        <p:nvPicPr>
-          <p:cNvPr id="3" name="Image 0" descr="/home/claude/f4/img/minesec_sheet.png">    </p:cNvPr>
-          <p:cNvPicPr>
-            <a:picLocks noChangeAspect="1"/>
-          </p:cNvPicPr>
-          <p:nvPr/>
-        </p:nvPicPr>
-        <p:blipFill>
-          <a:blip r:embed="rId1"/>
-          <a:stretch>
-            <a:fillRect/>
-          </a:stretch>
-        </p:blipFill>
-        <p:spPr>
-          <a:xfrm>
-            <a:off x="0" y="658368"/>
-            <a:ext cx="3840480" cy="5833872"/>
-          </a:xfrm>
-          <a:prstGeom prst="rect">
-            <a:avLst/>
-          </a:prstGeom>
-        </p:spPr>
-      </p:pic>
-      <p:sp>
-        <p:nvSpPr>
-          <p:cNvPr id="4" name="Text 1"/>
-          <p:cNvSpPr/>
-          <p:nvPr/>
-        </p:nvSpPr>
-        <p:spPr>
-          <a:xfrm>
-            <a:off x="4069080" y="1005840"/>
-            <a:ext cx="7802575" cy="731520"/>
-          </a:xfrm>
-          <a:prstGeom prst="rect">
-            <a:avLst/>
-          </a:prstGeom>
-          <a:noFill/>
-          <a:ln/>
-        </p:spPr>
-        <p:txBody>
-          <a:bodyPr wrap="square" lIns="0" tIns="0" rIns="0" bIns="0" rtlCol="0" anchor="ctr">
-            <a:normAutofit/>
-          </a:bodyPr>
-          <a:lstStyle/>
-          <a:p>
-            <a:pPr algn="ctr" indent="0" marL="0">
-              <a:buNone/>
-            </a:pPr>
-            <a:r>
-              <a:rPr lang="en-US" sz="3600" b="1" dirty="0">
-                <a:solidFill>
-                  <a:srgbClr val="990011"/>
-                </a:solidFill>
-                <a:latin typeface="Times New Roman" pitchFamily="34" charset="0"/>
-                <a:ea typeface="Times New Roman" pitchFamily="34" charset="-122"/>
-                <a:cs typeface="Times New Roman" pitchFamily="34" charset="-120"/>
-              </a:rPr>
-              <a:t>Teacher's Note</a:t>
-            </a:r>
-            <a:endParaRPr lang="en-US" sz="3600" dirty="0"/>
-          </a:p>
-        </p:txBody>
-      </p:sp>
-      <p:sp>
-        <p:nvSpPr>
-          <p:cNvPr id="5" name="Text 2"/>
-          <p:cNvSpPr/>
-          <p:nvPr/>
-        </p:nvSpPr>
-        <p:spPr>
-          <a:xfrm>
-            <a:off x="4069080" y="1783080"/>
-            <a:ext cx="7802575" cy="4663440"/>
-          </a:xfrm>
-          <a:prstGeom prst="rect">
-            <a:avLst/>
-          </a:prstGeom>
-          <a:noFill/>
-          <a:ln/>
-        </p:spPr>
-        <p:txBody>
-          <a:bodyPr wrap="square" lIns="0" tIns="0" rIns="0" bIns="0" rtlCol="0" anchor="t"/>
-          <a:lstStyle/>
-          <a:p>
-            <a:pPr algn="l" marL="342900" indent="-342900">
-              <a:spcAft>
-                <a:spcPts val="800"/>
-              </a:spcAft>
-              <a:buSzPct val="100000"/>
-              <a:buChar char="•"/>
-            </a:pPr>
-            <a:r>
-              <a:rPr lang="en-US" sz="2000" dirty="0">
-                <a:solidFill>
-                  <a:srgbClr val="111111"/>
-                </a:solidFill>
-                <a:latin typeface="Calibri" pitchFamily="34" charset="0"/>
-                <a:ea typeface="Calibri" pitchFamily="34" charset="-122"/>
-                <a:cs typeface="Calibri" pitchFamily="34" charset="-120"/>
-              </a:rPr>
-              <a:t>Timing: Homework correction, plan, objectives 8 min | Recall, situation, action 10 min | 5 activities 30 min | Board summary (copying) 30 min | Evaluation, remediation 10 min | Homework, next lesson 5 min | Logbook 7 min</a:t>
-            </a:r>
-            <a:endParaRPr lang="en-US" sz="2000" dirty="0"/>
-          </a:p>
-          <a:p>
-            <a:pPr algn="l" marL="342900" indent="-342900">
-              <a:spcAft>
-                <a:spcPts val="800"/>
-              </a:spcAft>
-              <a:buSzPct val="100000"/>
-              <a:buChar char="•"/>
-            </a:pPr>
-            <a:r>
-              <a:rPr lang="en-US" sz="2000" dirty="0">
-                <a:solidFill>
-                  <a:srgbClr val="111111"/>
-                </a:solidFill>
-                <a:latin typeface="Calibri" pitchFamily="34" charset="0"/>
-                <a:ea typeface="Calibri" pitchFamily="34" charset="-122"/>
-                <a:cs typeface="Calibri" pitchFamily="34" charset="-120"/>
-              </a:rPr>
-              <a:t>Without the projector (Activity 1): write the definition on the board.</a:t>
-            </a:r>
-            <a:endParaRPr lang="en-US" sz="2000" dirty="0"/>
-          </a:p>
-          <a:p>
-            <a:pPr algn="l" marL="342900" indent="-342900">
-              <a:spcAft>
-                <a:spcPts val="800"/>
-              </a:spcAft>
-              <a:buSzPct val="100000"/>
-              <a:buChar char="•"/>
-            </a:pPr>
-            <a:r>
-              <a:rPr lang="en-US" sz="2000" dirty="0">
-                <a:solidFill>
-                  <a:srgbClr val="111111"/>
-                </a:solidFill>
-                <a:latin typeface="Calibri" pitchFamily="34" charset="0"/>
-                <a:ea typeface="Calibri" pitchFamily="34" charset="-122"/>
-                <a:cs typeface="Calibri" pitchFamily="34" charset="-120"/>
-              </a:rPr>
-              <a:t>Without the projector (Activity 2): work it out on the board.</a:t>
-            </a:r>
-            <a:endParaRPr lang="en-US" sz="2000" dirty="0"/>
-          </a:p>
-          <a:p>
-            <a:pPr algn="l" marL="342900" indent="-342900">
-              <a:spcAft>
-                <a:spcPts val="800"/>
-              </a:spcAft>
-              <a:buSzPct val="100000"/>
-              <a:buChar char="•"/>
-            </a:pPr>
-            <a:r>
-              <a:rPr lang="en-US" sz="2000" dirty="0">
-                <a:solidFill>
-                  <a:srgbClr val="111111"/>
-                </a:solidFill>
-                <a:latin typeface="Calibri" pitchFamily="34" charset="0"/>
-                <a:ea typeface="Calibri" pitchFamily="34" charset="-122"/>
-                <a:cs typeface="Calibri" pitchFamily="34" charset="-120"/>
-              </a:rPr>
-              <a:t>Without the projector (Activity 3): work it out on the board.</a:t>
-            </a:r>
-            <a:endParaRPr lang="en-US" sz="2000" dirty="0"/>
-          </a:p>
-          <a:p>
-            <a:pPr algn="l" marL="342900" indent="-342900">
-              <a:spcAft>
-                <a:spcPts val="800"/>
-              </a:spcAft>
-              <a:buSzPct val="100000"/>
-              <a:buChar char="•"/>
-            </a:pPr>
-            <a:r>
-              <a:rPr lang="en-US" sz="2000" dirty="0">
-                <a:solidFill>
-                  <a:srgbClr val="111111"/>
-                </a:solidFill>
-                <a:latin typeface="Calibri" pitchFamily="34" charset="0"/>
-                <a:ea typeface="Calibri" pitchFamily="34" charset="-122"/>
-                <a:cs typeface="Calibri" pitchFamily="34" charset="-120"/>
-              </a:rPr>
-              <a:t>Without the projector (Activity 4): work it out on the board.</a:t>
-            </a:r>
-            <a:endParaRPr lang="en-US" sz="2000" dirty="0"/>
-          </a:p>
-          <a:p>
-            <a:pPr algn="l" marL="342900" indent="-342900">
-              <a:spcAft>
-                <a:spcPts val="800"/>
-              </a:spcAft>
-              <a:buSzPct val="100000"/>
-              <a:buChar char="•"/>
-            </a:pPr>
-            <a:r>
-              <a:rPr lang="en-US" sz="2000" dirty="0">
-                <a:solidFill>
-                  <a:srgbClr val="111111"/>
-                </a:solidFill>
-                <a:latin typeface="Calibri" pitchFamily="34" charset="0"/>
-                <a:ea typeface="Calibri" pitchFamily="34" charset="-122"/>
-                <a:cs typeface="Calibri" pitchFamily="34" charset="-120"/>
-              </a:rPr>
-              <a:t>Without the projector (Activity 5): read the values of 2020.</a:t>
-            </a:r>
-            <a:endParaRPr lang="en-US" sz="2000" dirty="0"/>
-          </a:p>
-        </p:txBody>
-      </p:sp>
-      <p:sp>
-        <p:nvSpPr>
-          <p:cNvPr id="25" name="Slide Number Placeholder 0"/>
-          <p:cNvSpPr>
-            <a:spLocks noGrp="1"/>
-          </p:cNvSpPr>
-          <p:nvPr>
-            <p:ph type="sldNum" sz="quarter" idx="4294967295"/>
-          </p:nvPr>
-        </p:nvSpPr>
-        <p:spPr>
-          <a:xfrm>
-            <a:off x="27432" y="91440"/>
-            <a:ext cx="585216" cy="475488"/>
-          </a:xfrm>
-          <a:prstGeom prst="rect">
-            <a:avLst/>
-          </a:prstGeom>
-          <a:extLst>
-            <a:ext uri="{C572A759-6A51-4108-AA02-DFA0A04FC94B}">
-              <ma14:wrappingTextBoxFlag xmlns:ma14="http://schemas.microsoft.com/office/mac/drawingml/2011/main" val="0"/>
-            </a:ext>
-          </a:extLst>
-        </p:spPr>
-        <p:txBody>
-          <a:bodyPr/>
-          <a:lstStyle>
-            <a:lvl1pPr>
-              <a:defRPr sz="2000">
-                <a:solidFill>
-                  <a:srgbClr val="FFFFFF"/>
-                </a:solidFill>
-                <a:latin typeface="Calibri"/>
-                <a:ea typeface="Calibri"/>
-                <a:cs typeface="Calibri"/>
-              </a:defRPr>
-            </a:lvl1pPr>
-          </a:lstStyle>
-          <a:p>
-            <a:pPr algn="ctr"/>
-            <a:fld id="{F7021451-1387-4CA6-816F-3879F97B5CBC}" type="slidenum">
-              <a:rPr b="1" lang="en-US"/>
               <a:t>51</a:t>
             </a:fld>
             <a:endParaRPr lang="en-US"/>
@@ -20227,7 +20384,7 @@
                 <a:ea typeface="Calibri" pitchFamily="34" charset="-122"/>
                 <a:cs typeface="Calibri" pitchFamily="34" charset="-120"/>
               </a:rPr>
-              <a:t>REFERENCES</a:t>
+              <a:t>TEACHER'S NOTE</a:t>
             </a:r>
             <a:endParaRPr lang="en-US" sz="1400" dirty="0"/>
           </a:p>
@@ -20250,7 +20407,7 @@
         <p:spPr>
           <a:xfrm>
             <a:off x="0" y="658368"/>
-            <a:ext cx="5120640" cy="5833872"/>
+            <a:ext cx="3840480" cy="5833872"/>
           </a:xfrm>
           <a:prstGeom prst="rect">
             <a:avLst/>
@@ -20265,8 +20422,8 @@
         </p:nvSpPr>
         <p:spPr>
           <a:xfrm>
-            <a:off x="5349240" y="1005840"/>
-            <a:ext cx="6522415" cy="731520"/>
+            <a:off x="4069080" y="1005840"/>
+            <a:ext cx="7802575" cy="731520"/>
           </a:xfrm>
           <a:prstGeom prst="rect">
             <a:avLst/>
@@ -20292,7 +20449,7 @@
                 <a:ea typeface="Times New Roman" pitchFamily="34" charset="-122"/>
                 <a:cs typeface="Times New Roman" pitchFamily="34" charset="-120"/>
               </a:rPr>
-              <a:t>References</a:t>
+              <a:t>Teacher's Note</a:t>
             </a:r>
             <a:endParaRPr lang="en-US" sz="3600" dirty="0"/>
           </a:p>
@@ -20306,8 +20463,8 @@
         </p:nvSpPr>
         <p:spPr>
           <a:xfrm>
-            <a:off x="5349240" y="1783080"/>
-            <a:ext cx="6522415" cy="4663440"/>
+            <a:off x="4069080" y="1783080"/>
+            <a:ext cx="7802575" cy="4663440"/>
           </a:xfrm>
           <a:prstGeom prst="rect">
             <a:avLst/>
@@ -20327,7 +20484,7 @@
               <a:buChar char="•"/>
             </a:pPr>
             <a:r>
-              <a:rPr lang="en-US" sz="1800" dirty="0">
+              <a:rPr lang="en-US" sz="2000" dirty="0">
                 <a:solidFill>
                   <a:srgbClr val="111111"/>
                 </a:solidFill>
@@ -20335,9 +20492,9 @@
                 <a:ea typeface="Calibri" pitchFamily="34" charset="-122"/>
                 <a:cs typeface="Calibri" pitchFamily="34" charset="-120"/>
               </a:rPr>
-              <a:t>Geography Syllabus, Forms I–V, MINESEC (2023) — Form 2, Module 1: Man in his Environment.</a:t>
-            </a:r>
-            <a:endParaRPr lang="en-US" sz="1800" dirty="0"/>
+              <a:t>Timing: Homework correction, plan, objectives 8 min | Recall, situation, action 10 min | 5 activities 30 min | Board summary (copying) 30 min | Evaluation, remediation 10 min | Homework, next lesson 5 min | Logbook 7 min</a:t>
+            </a:r>
+            <a:endParaRPr lang="en-US" sz="2000" dirty="0"/>
           </a:p>
           <a:p>
             <a:pPr algn="l" marL="342900" indent="-342900">
@@ -20348,7 +20505,7 @@
               <a:buChar char="•"/>
             </a:pPr>
             <a:r>
-              <a:rPr lang="en-US" sz="1800" dirty="0">
+              <a:rPr lang="en-US" sz="2000" dirty="0">
                 <a:solidFill>
                   <a:srgbClr val="111111"/>
                 </a:solidFill>
@@ -20356,9 +20513,9 @@
                 <a:ea typeface="Calibri" pitchFamily="34" charset="-122"/>
                 <a:cs typeface="Calibri" pitchFamily="34" charset="-120"/>
               </a:rPr>
-              <a:t>Photo, Activity 2: “Newborn baby rests” by World Bank Photo Collection, CC BY-NC-ND 2.0, via Flickr (https://www.flickr.com/photos/10816734@N03/19845580540)</a:t>
-            </a:r>
-            <a:endParaRPr lang="en-US" sz="1800" dirty="0"/>
+              <a:t>Without the projector (Activity 1): write the definition on the board.</a:t>
+            </a:r>
+            <a:endParaRPr lang="en-US" sz="2000" dirty="0"/>
           </a:p>
           <a:p>
             <a:pPr algn="l" marL="342900" indent="-342900">
@@ -20369,7 +20526,7 @@
               <a:buChar char="•"/>
             </a:pPr>
             <a:r>
-              <a:rPr lang="en-US" sz="1800" dirty="0">
+              <a:rPr lang="en-US" sz="2000" dirty="0">
                 <a:solidFill>
                   <a:srgbClr val="111111"/>
                 </a:solidFill>
@@ -20377,9 +20534,72 @@
                 <a:ea typeface="Calibri" pitchFamily="34" charset="-122"/>
                 <a:cs typeface="Calibri" pitchFamily="34" charset="-120"/>
               </a:rPr>
-              <a:t>Diagrams and animations: drawn for this lesson (Geography Department).</a:t>
-            </a:r>
-            <a:endParaRPr lang="en-US" sz="1800" dirty="0"/>
+              <a:t>Without the projector (Activity 2): work it out on the board.</a:t>
+            </a:r>
+            <a:endParaRPr lang="en-US" sz="2000" dirty="0"/>
+          </a:p>
+          <a:p>
+            <a:pPr algn="l" marL="342900" indent="-342900">
+              <a:spcAft>
+                <a:spcPts val="800"/>
+              </a:spcAft>
+              <a:buSzPct val="100000"/>
+              <a:buChar char="•"/>
+            </a:pPr>
+            <a:r>
+              <a:rPr lang="en-US" sz="2000" dirty="0">
+                <a:solidFill>
+                  <a:srgbClr val="111111"/>
+                </a:solidFill>
+                <a:latin typeface="Calibri" pitchFamily="34" charset="0"/>
+                <a:ea typeface="Calibri" pitchFamily="34" charset="-122"/>
+                <a:cs typeface="Calibri" pitchFamily="34" charset="-120"/>
+              </a:rPr>
+              <a:t>Without the projector (Activity 3): work it out on the board.</a:t>
+            </a:r>
+            <a:endParaRPr lang="en-US" sz="2000" dirty="0"/>
+          </a:p>
+          <a:p>
+            <a:pPr algn="l" marL="342900" indent="-342900">
+              <a:spcAft>
+                <a:spcPts val="800"/>
+              </a:spcAft>
+              <a:buSzPct val="100000"/>
+              <a:buChar char="•"/>
+            </a:pPr>
+            <a:r>
+              <a:rPr lang="en-US" sz="2000" dirty="0">
+                <a:solidFill>
+                  <a:srgbClr val="111111"/>
+                </a:solidFill>
+                <a:latin typeface="Calibri" pitchFamily="34" charset="0"/>
+                <a:ea typeface="Calibri" pitchFamily="34" charset="-122"/>
+                <a:cs typeface="Calibri" pitchFamily="34" charset="-120"/>
+              </a:rPr>
+              <a:t>Without the projector (Activity 4): work it out on the board.</a:t>
+            </a:r>
+            <a:endParaRPr lang="en-US" sz="2000" dirty="0"/>
+          </a:p>
+          <a:p>
+            <a:pPr algn="l" marL="342900" indent="-342900">
+              <a:spcAft>
+                <a:spcPts val="800"/>
+              </a:spcAft>
+              <a:buSzPct val="100000"/>
+              <a:buChar char="•"/>
+            </a:pPr>
+            <a:r>
+              <a:rPr lang="en-US" sz="2000" dirty="0">
+                <a:solidFill>
+                  <a:srgbClr val="111111"/>
+                </a:solidFill>
+                <a:latin typeface="Calibri" pitchFamily="34" charset="0"/>
+                <a:ea typeface="Calibri" pitchFamily="34" charset="-122"/>
+                <a:cs typeface="Calibri" pitchFamily="34" charset="-120"/>
+              </a:rPr>
+              <a:t>Without the projector (Activity 5): read the values of 2020.</a:t>
+            </a:r>
+            <a:endParaRPr lang="en-US" sz="2000" dirty="0"/>
           </a:p>
         </p:txBody>
       </p:sp>
@@ -20426,6 +20646,268 @@
             <a:fld id="{F7021451-1387-4CA6-816F-3879F97B5CBC}" type="slidenum">
               <a:rPr b="1" lang="en-US"/>
               <a:t>52</a:t>
+            </a:fld>
+            <a:endParaRPr lang="en-US"/>
+          </a:p>
+        </p:txBody>
+      </p:sp>
+    </p:spTree>
+  </p:cSld>
+  <p:clrMapOvr>
+    <a:masterClrMapping/>
+  </p:clrMapOvr>
+</p:sld>
+</file>
+
+<file path=ppt/slides/slide53.xml><?xml version="1.0" encoding="utf-8"?>
+<p:sld xmlns:a="http://schemas.openxmlformats.org/drawingml/2006/main" xmlns:r="http://schemas.openxmlformats.org/officeDocument/2006/relationships" xmlns:p="http://schemas.openxmlformats.org/presentationml/2006/main">
+  <p:cSld name="Slide 53">
+    <p:spTree>
+      <p:nvGrpSpPr>
+        <p:cNvPr id="1" name=""/>
+        <p:cNvGrpSpPr/>
+        <p:nvPr/>
+      </p:nvGrpSpPr>
+      <p:grpSpPr>
+        <a:xfrm>
+          <a:off x="0" y="0"/>
+          <a:ext cx="0" cy="0"/>
+          <a:chOff x="0" y="0"/>
+          <a:chExt cx="0" cy="0"/>
+        </a:xfrm>
+      </p:grpSpPr>
+      <p:sp>
+        <p:nvSpPr>
+          <p:cNvPr id="2" name="Text 0"/>
+          <p:cNvSpPr/>
+          <p:nvPr/>
+        </p:nvSpPr>
+        <p:spPr>
+          <a:xfrm>
+            <a:off x="457200" y="713232"/>
+            <a:ext cx="11368735" cy="274320"/>
+          </a:xfrm>
+          <a:prstGeom prst="rect">
+            <a:avLst/>
+          </a:prstGeom>
+          <a:noFill/>
+          <a:ln/>
+        </p:spPr>
+        <p:txBody>
+          <a:bodyPr wrap="square" lIns="0" tIns="0" rIns="0" bIns="0" rtlCol="0" anchor="ctr"/>
+          <a:lstStyle/>
+          <a:p>
+            <a:pPr algn="r" indent="0" marL="0">
+              <a:buNone/>
+            </a:pPr>
+            <a:r>
+              <a:rPr lang="en-US" sz="1400" b="1" dirty="0">
+                <a:solidFill>
+                  <a:srgbClr val="1C3F6E"/>
+                </a:solidFill>
+                <a:latin typeface="Calibri" pitchFamily="34" charset="0"/>
+                <a:ea typeface="Calibri" pitchFamily="34" charset="-122"/>
+                <a:cs typeface="Calibri" pitchFamily="34" charset="-120"/>
+              </a:rPr>
+              <a:t>REFERENCES</a:t>
+            </a:r>
+            <a:endParaRPr lang="en-US" sz="1400" dirty="0"/>
+          </a:p>
+        </p:txBody>
+      </p:sp>
+      <p:pic>
+        <p:nvPicPr>
+          <p:cNvPr id="3" name="Image 0" descr="/home/claude/f4/img/minesec_sheet.png">    </p:cNvPr>
+          <p:cNvPicPr>
+            <a:picLocks noChangeAspect="1"/>
+          </p:cNvPicPr>
+          <p:nvPr/>
+        </p:nvPicPr>
+        <p:blipFill>
+          <a:blip r:embed="rId1"/>
+          <a:stretch>
+            <a:fillRect/>
+          </a:stretch>
+        </p:blipFill>
+        <p:spPr>
+          <a:xfrm>
+            <a:off x="0" y="658368"/>
+            <a:ext cx="5120640" cy="5833872"/>
+          </a:xfrm>
+          <a:prstGeom prst="rect">
+            <a:avLst/>
+          </a:prstGeom>
+        </p:spPr>
+      </p:pic>
+      <p:sp>
+        <p:nvSpPr>
+          <p:cNvPr id="4" name="Text 1"/>
+          <p:cNvSpPr/>
+          <p:nvPr/>
+        </p:nvSpPr>
+        <p:spPr>
+          <a:xfrm>
+            <a:off x="5349240" y="1005840"/>
+            <a:ext cx="6522415" cy="731520"/>
+          </a:xfrm>
+          <a:prstGeom prst="rect">
+            <a:avLst/>
+          </a:prstGeom>
+          <a:noFill/>
+          <a:ln/>
+        </p:spPr>
+        <p:txBody>
+          <a:bodyPr wrap="square" lIns="0" tIns="0" rIns="0" bIns="0" rtlCol="0" anchor="ctr">
+            <a:normAutofit/>
+          </a:bodyPr>
+          <a:lstStyle/>
+          <a:p>
+            <a:pPr algn="ctr" indent="0" marL="0">
+              <a:buNone/>
+            </a:pPr>
+            <a:r>
+              <a:rPr lang="en-US" sz="3600" b="1" dirty="0">
+                <a:solidFill>
+                  <a:srgbClr val="990011"/>
+                </a:solidFill>
+                <a:latin typeface="Times New Roman" pitchFamily="34" charset="0"/>
+                <a:ea typeface="Times New Roman" pitchFamily="34" charset="-122"/>
+                <a:cs typeface="Times New Roman" pitchFamily="34" charset="-120"/>
+              </a:rPr>
+              <a:t>References</a:t>
+            </a:r>
+            <a:endParaRPr lang="en-US" sz="3600" dirty="0"/>
+          </a:p>
+        </p:txBody>
+      </p:sp>
+      <p:sp>
+        <p:nvSpPr>
+          <p:cNvPr id="5" name="Text 2"/>
+          <p:cNvSpPr/>
+          <p:nvPr/>
+        </p:nvSpPr>
+        <p:spPr>
+          <a:xfrm>
+            <a:off x="5349240" y="1783080"/>
+            <a:ext cx="6522415" cy="4663440"/>
+          </a:xfrm>
+          <a:prstGeom prst="rect">
+            <a:avLst/>
+          </a:prstGeom>
+          <a:noFill/>
+          <a:ln/>
+        </p:spPr>
+        <p:txBody>
+          <a:bodyPr wrap="square" lIns="0" tIns="0" rIns="0" bIns="0" rtlCol="0" anchor="t"/>
+          <a:lstStyle/>
+          <a:p>
+            <a:pPr algn="l" marL="342900" indent="-342900">
+              <a:spcAft>
+                <a:spcPts val="800"/>
+              </a:spcAft>
+              <a:buSzPct val="100000"/>
+              <a:buChar char="•"/>
+            </a:pPr>
+            <a:r>
+              <a:rPr lang="en-US" sz="1800" dirty="0">
+                <a:solidFill>
+                  <a:srgbClr val="111111"/>
+                </a:solidFill>
+                <a:latin typeface="Calibri" pitchFamily="34" charset="0"/>
+                <a:ea typeface="Calibri" pitchFamily="34" charset="-122"/>
+                <a:cs typeface="Calibri" pitchFamily="34" charset="-120"/>
+              </a:rPr>
+              <a:t>Geography Syllabus, Forms I–V, MINESEC (2023) — Form 2, Module 1: Man in his Environment.</a:t>
+            </a:r>
+            <a:endParaRPr lang="en-US" sz="1800" dirty="0"/>
+          </a:p>
+          <a:p>
+            <a:pPr algn="l" marL="342900" indent="-342900">
+              <a:spcAft>
+                <a:spcPts val="800"/>
+              </a:spcAft>
+              <a:buSzPct val="100000"/>
+              <a:buChar char="•"/>
+            </a:pPr>
+            <a:r>
+              <a:rPr lang="en-US" sz="1800" dirty="0">
+                <a:solidFill>
+                  <a:srgbClr val="111111"/>
+                </a:solidFill>
+                <a:latin typeface="Calibri" pitchFamily="34" charset="0"/>
+                <a:ea typeface="Calibri" pitchFamily="34" charset="-122"/>
+                <a:cs typeface="Calibri" pitchFamily="34" charset="-120"/>
+              </a:rPr>
+              <a:t>Photo, Activity 1: “Newborn baby rests” by World Bank Photo Collection, CC BY-NC-ND 2.0, via Flickr (https://www.flickr.com/photos/10816734@N03/19845580540)</a:t>
+            </a:r>
+            <a:endParaRPr lang="en-US" sz="1800" dirty="0"/>
+          </a:p>
+          <a:p>
+            <a:pPr algn="l" marL="342900" indent="-342900">
+              <a:spcAft>
+                <a:spcPts val="800"/>
+              </a:spcAft>
+              <a:buSzPct val="100000"/>
+              <a:buChar char="•"/>
+            </a:pPr>
+            <a:r>
+              <a:rPr lang="en-US" sz="1800" dirty="0">
+                <a:solidFill>
+                  <a:srgbClr val="111111"/>
+                </a:solidFill>
+                <a:latin typeface="Calibri" pitchFamily="34" charset="0"/>
+                <a:ea typeface="Calibri" pitchFamily="34" charset="-122"/>
+                <a:cs typeface="Calibri" pitchFamily="34" charset="-120"/>
+              </a:rPr>
+              <a:t>Diagrams and animations: drawn for this lesson (Geography Department).</a:t>
+            </a:r>
+            <a:endParaRPr lang="en-US" sz="1800" dirty="0"/>
+          </a:p>
+        </p:txBody>
+      </p:sp>
+      <p:sp>
+        <p:nvSpPr>
+          <p:cNvPr id="25" name="Slide Number Placeholder 0"/>
+          <p:cNvSpPr>
+            <a:spLocks noGrp="1"/>
+          </p:cNvSpPr>
+          <p:nvPr>
+            <p:ph type="sldNum" sz="quarter" idx="4294967295"/>
+          </p:nvPr>
+        </p:nvSpPr>
+        <p:spPr>
+          <a:xfrm>
+            <a:off x="27432" y="91440"/>
+            <a:ext cx="585216" cy="475488"/>
+          </a:xfrm>
+          <a:prstGeom prst="rect">
+            <a:avLst/>
+          </a:prstGeom>
+          <a:extLst>
+            <a:ext uri="{C572A759-6A51-4108-AA02-DFA0A04FC94B}">
+              <ma14:wrappingTextBoxFlag xmlns:ma14="http://schemas.microsoft.com/office/mac/drawingml/2011/main" val="0"/>
+            </a:ext>
+          </a:extLst>
+        </p:spPr>
+        <p:txBody>
+          <a:bodyPr/>
+          <a:lstStyle>
+            <a:lvl1pPr>
+              <a:defRPr sz="2000">
+                <a:solidFill>
+                  <a:srgbClr val="FFFFFF"/>
+                </a:solidFill>
+                <a:latin typeface="Calibri"/>
+                <a:ea typeface="Calibri"/>
+                <a:cs typeface="Calibri"/>
+              </a:defRPr>
+            </a:lvl1pPr>
+          </a:lstStyle>
+          <a:p>
+            <a:pPr algn="ctr"/>
+            <a:fld id="{F7021451-1387-4CA6-816F-3879F97B5CBC}" type="slidenum">
+              <a:rPr b="1" lang="en-US"/>
+              <a:t>53</a:t>
             </a:fld>
             <a:endParaRPr lang="en-US"/>
           </a:p>
@@ -21474,7 +21956,7 @@
                 <a:ea typeface="Times New Roman" pitchFamily="34" charset="-122"/>
                 <a:cs typeface="Times New Roman" pitchFamily="34" charset="-120"/>
               </a:rPr>
-              <a:t>In one year, a town of 100,000 people records 3,500 births and 900 deaths. The Mayor wants to know how fast the population of the town is growing.</a:t>
+              <a:t>In one year, a town of 100,000 people records 3,500 births and 900 deaths. The Mayor asks the class: "How can you tell me, with numbers, how fast our town is growing?"</a:t>
             </a:r>
             <a:endParaRPr lang="en-US" sz="4000" dirty="0"/>
           </a:p>

--- a/lecons/F2/02_F2_M1_PW01_Calculation_of_the_Demographic_Indices_of_Cameroon.pptx
+++ b/lecons/F2/02_F2_M1_PW01_Calculation_of_the_Demographic_Indices_of_Cameroon.pptx
@@ -13126,7 +13126,7 @@
         <p:spPr>
           <a:xfrm>
             <a:off x="0" y="658368"/>
-            <a:ext cx="3840480" cy="5833872"/>
+            <a:ext cx="5120640" cy="5833872"/>
           </a:xfrm>
           <a:prstGeom prst="rect">
             <a:avLst/>
@@ -13141,8 +13141,8 @@
         </p:nvSpPr>
         <p:spPr>
           <a:xfrm>
-            <a:off x="4069080" y="1005840"/>
-            <a:ext cx="7802575" cy="731520"/>
+            <a:off x="5349240" y="1005840"/>
+            <a:ext cx="6522415" cy="731520"/>
           </a:xfrm>
           <a:prstGeom prst="rect">
             <a:avLst/>
@@ -13182,8 +13182,8 @@
         </p:nvSpPr>
         <p:spPr>
           <a:xfrm>
-            <a:off x="4069080" y="1783080"/>
-            <a:ext cx="7802575" cy="4663440"/>
+            <a:off x="5349240" y="1783080"/>
+            <a:ext cx="6522415" cy="4663440"/>
           </a:xfrm>
           <a:prstGeom prst="rect">
             <a:avLst/>
@@ -13202,7 +13202,7 @@
               <a:buNone/>
             </a:pPr>
             <a:r>
-              <a:rPr lang="en-US" sz="4000" b="1" dirty="0">
+              <a:rPr lang="en-US" sz="3200" b="1" dirty="0">
                 <a:solidFill>
                   <a:srgbClr val="111111"/>
                 </a:solidFill>
@@ -13212,7 +13212,7 @@
               </a:rPr>
               <a:t>Topic: Man in his Environment</a:t>
             </a:r>
-            <a:endParaRPr lang="en-US" sz="4000" dirty="0"/>
+            <a:endParaRPr lang="en-US" sz="3200" dirty="0"/>
           </a:p>
           <a:p>
             <a:pPr algn="l" indent="0" marL="0">
@@ -13222,7 +13222,7 @@
               <a:buNone/>
             </a:pPr>
             <a:r>
-              <a:rPr lang="en-US" sz="4000" b="1" dirty="0">
+              <a:rPr lang="en-US" sz="3200" b="1" dirty="0">
                 <a:solidFill>
                   <a:srgbClr val="111111"/>
                 </a:solidFill>
@@ -13232,7 +13232,7 @@
               </a:rPr>
               <a:t>Sub-topic: The World's Population</a:t>
             </a:r>
-            <a:endParaRPr lang="en-US" sz="4000" dirty="0"/>
+            <a:endParaRPr lang="en-US" sz="3200" dirty="0"/>
           </a:p>
           <a:p>
             <a:pPr algn="l" indent="0" marL="0">
@@ -13242,7 +13242,7 @@
               <a:buNone/>
             </a:pPr>
             <a:r>
-              <a:rPr lang="en-US" sz="4000" b="1" dirty="0">
+              <a:rPr lang="en-US" sz="3200" b="1" dirty="0">
                 <a:solidFill>
                   <a:srgbClr val="990011"/>
                 </a:solidFill>
@@ -13252,7 +13252,7 @@
               </a:rPr>
               <a:t>Practical Work 1: Calculation of the Demographic Indices of Cameroon</a:t>
             </a:r>
-            <a:endParaRPr lang="en-US" sz="4000" dirty="0"/>
+            <a:endParaRPr lang="en-US" sz="3200" dirty="0"/>
           </a:p>
         </p:txBody>
       </p:sp>

--- a/lecons/F2/02_F2_M1_PW01_Calculation_of_the_Demographic_Indices_of_Cameroon.pptx
+++ b/lecons/F2/02_F2_M1_PW01_Calculation_of_the_Demographic_Indices_of_Cameroon.pptx
@@ -3458,7 +3458,7 @@
           <a:p>
             <a:r>
               <a:rPr lang="en-US" dirty="0"/>
-              <a:t>Before we start the new lesson, let us correct the homework I gave you at the end of Lesson 1: A Rapid Growth of the World's Population. The question was: Ask your parents how many brothers and sisters they had and compare with families today. Take out your exercise books.</a:t>
+              <a:t>Before we start the new lesson, let us correct the homework I gave you at the end of Lesson 1: A Rapid Growth of the World's Population. The question was: Write the formula of the birth rate. Take out your exercise books.</a:t>
             </a:r>
             <a:endParaRPr lang="en-US" dirty="0"/>
           </a:p>
@@ -4162,7 +4162,7 @@
           <a:p>
             <a:r>
               <a:rPr lang="en-US" dirty="0"/>
-              <a:t>For your homework: A village of 5,000 people has 200 births and 50 deaths. Calculate the three indices. We shall correct it at the beginning of our next lesson.</a:t>
+              <a:t>For your homework: Write the formula of population density. We shall correct it at the beginning of our next lesson.</a:t>
             </a:r>
             <a:endParaRPr lang="en-US" dirty="0"/>
           </a:p>
@@ -4426,7 +4426,7 @@
           <a:p>
             <a:r>
               <a:rPr lang="en-US" dirty="0"/>
-              <a:t>Here is a good answer. Answers vary. Often parents had many brothers and sisters (6 to 10); many families today have fewer children, but more of them survive. Compare it with your own answer and correct your work in red.</a:t>
+              <a:t>Here is a good answer. Birth rate = (births ÷ population) × 1,000, in ‰. Compare it with your own answer and correct your work in red.</a:t>
             </a:r>
             <a:endParaRPr lang="en-US" dirty="0"/>
           </a:p>
@@ -15115,7 +15115,7 @@
                 <a:ea typeface="Times New Roman" pitchFamily="34" charset="-122"/>
                 <a:cs typeface="Times New Roman" pitchFamily="34" charset="-120"/>
               </a:rPr>
-              <a:t>Ask your parents how many brothers and sisters they had and compare with families today.</a:t>
+              <a:t>Write the formula of the birth rate.</a:t>
             </a:r>
             <a:endParaRPr lang="en-US" sz="4000" dirty="0"/>
           </a:p>
@@ -17063,7 +17063,7 @@
                 <a:ea typeface="Times New Roman" pitchFamily="34" charset="-122"/>
                 <a:cs typeface="Times New Roman" pitchFamily="34" charset="-120"/>
               </a:rPr>
-              <a:t>A village of 5,000 people has 200 births and 50 deaths. Calculate the three indices.</a:t>
+              <a:t>Write the formula of population density.</a:t>
             </a:r>
             <a:endParaRPr lang="en-US" sz="4000" dirty="0"/>
           </a:p>
@@ -18668,7 +18668,7 @@
                 <a:ea typeface="Times New Roman" pitchFamily="34" charset="-122"/>
                 <a:cs typeface="Times New Roman" pitchFamily="34" charset="-120"/>
               </a:rPr>
-              <a:t>Answers vary. Often parents had many brothers and sisters (6 to 10); many families today have fewer children, but more of them survive.</a:t>
+              <a:t>Birth rate = (births ÷ population) × 1,000, in ‰.</a:t>
             </a:r>
             <a:endParaRPr lang="en-US" sz="4000" dirty="0"/>
           </a:p>
@@ -19946,7 +19946,7 @@
                           <a:ea typeface="Calibri" pitchFamily="34" charset="-122"/>
                           <a:cs typeface="Calibri" pitchFamily="34" charset="-120"/>
                         </a:rPr>
-                        <a:t>A village of 5,000 people has 200 births and 50 deaths. Calculate the three indices.</a:t>
+                        <a:t>Write the formula of population density.</a:t>
                       </a:r>
                       <a:endParaRPr lang="en-US" sz="1600" dirty="0">
                         <a:latin typeface="Calibri" charset="0"/>
